--- a/HCK1_group/HCK1_group_mywork/指揮デバイス.pptx
+++ b/HCK1_group/HCK1_group_mywork/指揮デバイス.pptx
@@ -374,14 +374,14 @@
           <inkml:channelProperty channel="F" name="resolution" value="0" units="1/dev"/>
         </inkml:channelProperties>
       </inkml:inkSource>
-      <inkml:timestamp xml:id="ts0" timeString="2026-05-11T19:20:23.736"/>
+      <inkml:timestamp xml:id="ts0" timeString="2026-05-08T08:26:26.490"/>
     </inkml:context>
     <inkml:brush xml:id="br0">
       <inkml:brushProperty name="width" value="0.035" units="cm"/>
       <inkml:brushProperty name="height" value="0.035" units="cm"/>
     </inkml:brush>
   </inkml:definitions>
-  <inkml:trace contextRef="#ctx0" brushRef="#br0">1 0 24575,'23'0'0,"20"0"0,30 0 0,-18 4 0,4 3 0,8 2 0,3 3 0,2 4 0,0 5 0,4 6 0,-2 4-338,0 4 1,0 3 337,4 7 0,1 4-265,-24-12 1,2 2 0,-2 1 264,-1 0 0,-1 0 0,-1 2 0,25 21 0,-2 1 0,-24-20 0,-1 0 0,0 2 0,1 0 0,-1 2 0,1 1 0,2 5 0,0 2 0,-1 1-469,1 5 1,0 2 0,-1 0 468,0 3 0,-1 1 0,-2 2 0,0 2 0,-2 1 0,-1 2 0,-1 1 0,0 1 0,-2 0 0,-2-1 0,-1 0 0,-1 1 0,-2 0 0,-2 1 0,-2 0 0,-1-1 0,-2 1 0,-1 0 0,0 1 0,-1 1 0,-1 1 0,-1 4 0,-2 2 0,-1 0 0,-1 0 0,-1 1 0,-2 0 0,-1 1 0,-1 1 0,-2-1 0,-3 0 0,-1-1 0,-2-1 0,-2-8 0,-1-1 0,-2-1-253,0-4 0,-1-2 0,-1-1 253,-1 26 0,-1-4 174,1-9 0,-2-4-174,0-10 0,-3-3 869,-4 31-869,-4-31 1441,-3-21-1441,1-9 879,-2-3-879,-3 0 95,-3 4-95,-1 3 0,0-5 0,7-5 0,3-7 0,5-5 0,4-7 0,2-3 0,2-7 0</inkml:trace>
+  <inkml:trace contextRef="#ctx0" brushRef="#br0">0 1 18188,'3'3'0,"-1"-1"0</inkml:trace>
 </inkml:ink>
 </file>
 
@@ -401,14 +401,14 @@
           <inkml:channelProperty channel="F" name="resolution" value="0" units="1/dev"/>
         </inkml:channelProperties>
       </inkml:inkSource>
-      <inkml:timestamp xml:id="ts0" timeString="2026-05-11T19:20:25.735"/>
+      <inkml:timestamp xml:id="ts0" timeString="2026-05-08T08:26:27.249"/>
     </inkml:context>
     <inkml:brush xml:id="br0">
       <inkml:brushProperty name="width" value="0.035" units="cm"/>
       <inkml:brushProperty name="height" value="0.035" units="cm"/>
     </inkml:brush>
   </inkml:definitions>
-  <inkml:trace contextRef="#ctx0" brushRef="#br0">0 0 24575,'0'7'0,"1"1"0,4 5 0,3 4 0,4 4 0,4 6 0,0 3 0,2 1 0,1 1 0,-2-2 0,-1 1 0,-3-2 0,-2 1 0,2 3 0,-2 4 0,3 6 0,4 5 0,0 0 0,0 3 0,-2-6 0,-2-4 0,-3-1 0,-1-9 0,-4-1 0,-2-4 0,-2-4 0,1-1 0,0-4 0,0-2 0,0-6 0,-3-5 0</inkml:trace>
+  <inkml:trace contextRef="#ctx0" brushRef="#br0">6 0 22690,'-3'0'0,"1"0"0</inkml:trace>
 </inkml:ink>
 </file>
 
@@ -428,14 +428,14 @@
           <inkml:channelProperty channel="F" name="resolution" value="0" units="1/dev"/>
         </inkml:channelProperties>
       </inkml:inkSource>
-      <inkml:timestamp xml:id="ts0" timeString="2026-05-11T19:20:27.282"/>
+      <inkml:timestamp xml:id="ts0" timeString="2026-05-08T08:26:27.774"/>
     </inkml:context>
     <inkml:brush xml:id="br0">
       <inkml:brushProperty name="width" value="0.035" units="cm"/>
       <inkml:brushProperty name="height" value="0.035" units="cm"/>
     </inkml:brush>
   </inkml:definitions>
-  <inkml:trace contextRef="#ctx0" brushRef="#br0">635 0 24575,'-9'9'0,"-5"5"0,-7 6 0,-1 5 0,0 2 0,2-1 0,3 1 0,2-1 0,2-3 0,3-4 0,-1-4 0,1-3 0,-2 1 0,-3 1 0,3-2 0,-5 3 0,-2 6 0,-5 5 0,-5 8 0,-1 1 0,-1-1 0,-1 1 0,3 1 0,1-3 0,2-1 0,5-4 0,2-4 0,4-2 0,3-4 0,2-3 0,1 0 0,1-1 0,1-2 0,2 1 0,-2-1 0,1-1 0,0 1 0,1-2 0,-1-1 0,1-2 0,2 0 0,1-3 0,2 0 0</inkml:trace>
+  <inkml:trace contextRef="#ctx0" brushRef="#br0">1 0 24575,'0'0'0</inkml:trace>
 </inkml:ink>
 </file>
 
@@ -482,14 +482,14 @@
           <inkml:channelProperty channel="F" name="resolution" value="0" units="1/dev"/>
         </inkml:channelProperties>
       </inkml:inkSource>
-      <inkml:timestamp xml:id="ts0" timeString="2026-05-11T19:21:31.320"/>
+      <inkml:timestamp xml:id="ts0" timeString="2026-05-08T08:26:20.754"/>
     </inkml:context>
     <inkml:brush xml:id="br0">
       <inkml:brushProperty name="width" value="0.035" units="cm"/>
       <inkml:brushProperty name="height" value="0.035" units="cm"/>
     </inkml:brush>
   </inkml:definitions>
-  <inkml:trace contextRef="#ctx0" brushRef="#br0">1 25 24575,'36'0'0,"23"0"0,36 0 0,-39 0 0,0 0 0,-4 0 0,0 0 0,46 0 0,-22 0 0,-10 0 0,-13 0 0,-4 0 0,0 0 0,-2 0 0,-2 0 0,-2 0 0,-6 0 0,-5 0 0,-6 0 0,-5 0 0,-5 0 0,-1 0 0,-1 0 0,3 0 0,8 0 0,2 0 0,2 0 0,1 0 0,-6 0 0,2 0 0,1 0 0,1 0 0,2 0 0,0 0 0,1 0 0,2 0 0,0 0 0,-2 0 0,2 0 0,1 0 0,6-1 0,8-2 0,4-3 0,8-1 0,4 3 0,0 1 0,-3 2 0,-12 1 0,-12 0 0,-8 0 0,-8 0 0,-2 0 0,-5 0 0,0 0 0,3 0 0,-1 0 0,2 0 0,0 0 0,0 0 0,0 0 0,1 0 0,-1 0 0,5 0 0,5 0 0,1 0 0,2 0 0,-5 0 0,-2 0 0,1 0 0,-3 0 0,-1 0 0,-2 0 0,-1 0 0,0 0 0,0 0 0,0 0 0,2 0 0,0 0 0,1 0 0,-3 0 0,-3 0 0,-4 0 0,-1 0 0,0 0 0,-4 0 0,0 0 0</inkml:trace>
+  <inkml:trace contextRef="#ctx0" brushRef="#br0">1 650 24575,'10'-20'0,"58"-26"0,12 7 0,12-2 0,-22 11 0,3 0 0,3 1-2231,13-3 0,3 2 0,-3 1 2231,-13 5 0,-3 1 0,-3 2 0,18-5 0,-3 1 292,-2 2 1,-3 3-293,-10 3 0,-2 2 0,4-1 0,2 2 0,2 1 0,1 2 0,-4 0 0,-2 1 0,-6 4 0,-3 2 0,-5-1 0,-3 1 1331,25 0-1331,7 0 0,-13 1 0,-4 3 3435,-12-3-3435,-4-3 1342,-2 0-1342,-1-1 0,12 5 0,28 1 0,-28 1 0,4 0 0,3 0 0,0 0-1253,2 0 1,-1 0 1252,-10 0 0,-2 0 0,-4 0 0,-1 0 0,-1 0 0,-2 0 0,45 0 0,-1 3 0,-14 7 0,-4 5 0,-14 8 0,-6 5 0,-12 0 0,-8 1 2505,-13-4-2505,-11-2 0,-4-3 0,-2-1 0,5 1 0,5 2 0,1 4 0,-1-4 0,-2 0 0,-6-6 0,-2-2 0,-2 0 0,-4-3 0,0 1 0,0-1 0,2-2 0,1-11 0,-1-7 0,0-1 0,-2 0 0</inkml:trace>
 </inkml:ink>
 </file>
 
@@ -509,14 +509,14 @@
           <inkml:channelProperty channel="F" name="resolution" value="0" units="1/dev"/>
         </inkml:channelProperties>
       </inkml:inkSource>
-      <inkml:timestamp xml:id="ts0" timeString="2026-05-11T19:21:34.707"/>
+      <inkml:timestamp xml:id="ts0" timeString="2026-05-09T20:03:39.399"/>
     </inkml:context>
     <inkml:brush xml:id="br0">
       <inkml:brushProperty name="width" value="0.035" units="cm"/>
       <inkml:brushProperty name="height" value="0.035" units="cm"/>
     </inkml:brush>
   </inkml:definitions>
-  <inkml:trace contextRef="#ctx0" brushRef="#br0">0 46 24575,'12'0'0,"8"0"0,23 0 0,11 0 0,5 0 0,8 0 0,-2 0 0,-5 0 0,-3 0 0,-11 0 0,-5 0 0,-7 0 0,-8 0 0,-4 0 0,-3 0 0,-1 0 0,1 0 0,-1 0 0,0 0 0,0 0 0,0-3 0,3 0 0,4 0 0,7 1 0,6 2 0,6-1 0,6 1 0,-2 0 0,-3 0 0,-8 0 0,-9 0 0,-6 0 0,-5 0 0,-2 0 0,1 0 0,0 0 0,4 0 0,2 0 0,-1 0 0,3 0 0,-2 0 0,0 0 0,-1 0 0,-1 0 0,4 0 0,3-1 0,4-2 0,3 0 0,-1 0 0,3 1 0,-1 2 0,0 0 0,-2 0 0,-2 0 0,-2 0 0,-4 0 0,-4 0 0,-5-2 0,-1-1 0,-2-1 0,-2 2 0,0 2 0,-3 0 0,2 0 0,-1 0 0,3 0 0,-2-2 0,-1-1 0,-1 0 0,1 1 0,1 1 0,-2 1 0,3 0 0,1 0 0,3 0 0,2 0 0,-2 0 0,-2 0 0,0 0 0,-2 0 0,0 0 0,1 0 0,-1 0 0,0 0 0,-1 0 0,0 0 0,-6 0 0,1 0 0</inkml:trace>
+  <inkml:trace contextRef="#ctx0" brushRef="#br0">3322 0 24575,'-14'0'0,"-7"2"0,-13 4 0,-4 5 0,-5 6 0,-1 4 0,4-1 0,-4 1 0,-4-1 0,-9 1 0,-12 4 0,-10 5 0,0 3 0,2 2 0,9-3 0,13-5 0,6 0 0,4-1 0,-2 0 0,-7 2 0,-5 1 0,-8 8 0,-11 6 0,36-17 0,-1 0 0,-6 4 0,-1 0 0,-3 1 0,1 0 0,-1 4 0,0-1 0,1 1 0,-1-1 0,3 2 0,1-1 0,2-3 0,0-1 0,4-1 0,0-1 0,-31 26 0,14-8 0,10-3 0,7-6 0,0-1 0,-4 3 0,-5 4 0,-5 6 0,-3 3 0,0 0 0,4-3 0,2-3 0,8-7 0,5-3 0,7-3 0,5-4 0,4-3 0,2-3 0,2 0 0,0-1 0,2-2 0,-3 0 0,0-2 0,2 2 0,-1 1 0,2 1 0,-3 1 0,3-2 0,0 0 0,1-2 0,3-3 0,-1 2 0,1-2 0,3-1 0,-1-1 0,1 0 0,-1 0 0,0 2 0,0-2 0,0 0 0,0 0 0,2-2 0,-1 0 0,2-3 0,0-2 0,3-1 0,1-1 0,0 0 0,3 1 0,-1-2 0,1 3 0,0 0 0,-1 0 0,1 1 0,0 0 0,1-5 0,1 1 0,0-6 0</inkml:trace>
 </inkml:ink>
 </file>
 
@@ -536,18 +536,99 @@
           <inkml:channelProperty channel="F" name="resolution" value="0" units="1/dev"/>
         </inkml:channelProperties>
       </inkml:inkSource>
-      <inkml:timestamp xml:id="ts0" timeString="2026-05-11T19:21:49.286"/>
+      <inkml:timestamp xml:id="ts0" timeString="2026-05-09T20:03:42.251"/>
     </inkml:context>
     <inkml:brush xml:id="br0">
       <inkml:brushProperty name="width" value="0.035" units="cm"/>
       <inkml:brushProperty name="height" value="0.035" units="cm"/>
     </inkml:brush>
   </inkml:definitions>
-  <inkml:trace contextRef="#ctx0" brushRef="#br0">1 166 24575,'18'0'0,"39"0"0,-3 0 0,8 0 0,18 0 0,6 0-849,12 0 1,3 0 848,-2 0 0,-1 0 0,-12 0 0,-4 0 275,-13 0 0,-5 0-275,31 0 280,-25 0-280,-2 0 0,13-1 0,14-3 867,1 0-867,-5-3 0,-7 1 0,-11 2 0,5 1 0,6 3 0,-1 0 0,3 0 0,-8 0 0,-6 0 0,6 0 0,6 0 0,15 0 0,-46 0 0,1 0 0,-3 0 0,0 0 0,48 0 0,-19 0 0,-7 0 0,-2 0 0,1 0 0,6 0 0,2 0 0,0 0 0,-2 0 0,-2 1 0,-1 5 0,2 4 0,3 3 0,4-1 0,5-3 0,9 3 0,-47-7 0,1 0 0,3 0 0,0 1 0,0-1 0,0 1 0,0-1 0,1 1 0,-2 1 0,0 0 0,5 1 0,-1 0 0,0 1 0,0 0 0,2 1 0,0 1 0,-1 1 0,-1 0 0,-4-1 0,-1-1 0,-3 0 0,-1 0 0,35 6 0,-12-3 0,-4 0 0,-3-4 0,-2-3 0,-3-3 0,-2-3 0,-1 3 0,6 0 0,1 4 0,-2-1 0,-4-2 0,-4 2 0,-6-3 0,-2 0 0,0 0 0,4-3 0,7 0 0,6 0 0,3 0 0,-1 0 0,-3 0 0,-5 0 0,-8 0 0,-5 0 0,-2 0 0,3 0 0,5 0 0,7 0 0,6-3 0,6-4 0,2-4 0,0-7 0,2-1 0,-5-1 0,-2 1 0,-4 6 0,-2 4 0,1 3 0,-1 1 0,2-3 0,-8 0 0,-5-1 0,-6 0 0,-6 1 0,-2 1 0,-2 1 0,-6-2 0,2 2 0,-5 0 0,-2-2 0,1-1 0,1-3 0,4 1 0,5 0 0,0-1 0,1 4 0,1-1 0,-1 0 0,-1 0 0,-2 0 0,-3 3 0,-3 1 0,-3 1 0,-6 1 0,-3 1 0,-1 2 0,-2 0 0,1 0 0,-2 0 0,2 0 0,2-2 0,2-1 0,3-3 0,1-2 0,-1 2 0,-2-1 0,0 1 0,-3 1 0,2 0 0,-2-1 0,0 1 0,1-1 0,-2-1 0,0 1 0,-2 0 0,0 3 0,3 0 0,-2 0 0,0-2 0,1-2 0,-2 2 0,3-3 0,-1 1 0,-1-2 0,-5 4 0,-2 1 0</inkml:trace>
+  <inkml:trace contextRef="#ctx0" brushRef="#br0">0 1 24575,'17'0'0,"7"0"0,12 0 0,11 0 0,9 0 0,5 0 0,1 3 0,-2 5 0,-5 3 0,-10 2 0,-10-2 0,-9-4 0,-6 1 0,-3-3 0,-5 0 0,-3 0 0,-3-2 0,2-1 0,4-2 0,6 1 0,8-1 0,8 0 0,9 0 0,1 0 0,-3 0 0,-6 0 0,-7 0 0,-8 3 0,-6 4 0,-6 4 0,-4 1 0,-2-1 0,-2 0 0,0-2 0,-2 0 0,-1-1 0,-3-2 0,-4 0 0,-2 0 0,-3-1 0,-2 3 0,-2 4 0,-5 4 0,-3 3 0,-6 0 0,-3 4 0,-1 0 0,0 3 0,3-1 0,3-2 0,4-1 0,3-4 0,4 1 0,5-1 0,3-1 0,0-1 0,2-1 0,0 0 0,1-2 0,2 2 0,1-1 0,1 0 0,0 0 0,2-1 0,0-3 0,0 0 0,1-1 0,-1 0 0,0 3 0,3 3 0,0 0 0,0 1 0,0-1 0,0-8 0,0-2 0</inkml:trace>
 </inkml:ink>
 </file>
 
 <file path=ppt/ink/ink23.xml><?xml version="1.0" encoding="utf-8"?>
+<inkml:ink xmlns:inkml="http://www.w3.org/2003/InkML">
+  <inkml:definitions>
+    <inkml:context xml:id="ctx0">
+      <inkml:inkSource xml:id="inkSrc0">
+        <inkml:traceFormat>
+          <inkml:channel name="X" type="integer" min="-2.14748E9" max="2.14748E9" units="cm"/>
+          <inkml:channel name="Y" type="integer" min="-2.14748E9" max="2.14748E9" units="cm"/>
+          <inkml:channel name="F" type="integer" max="32767" units="dev"/>
+        </inkml:traceFormat>
+        <inkml:channelProperties>
+          <inkml:channelProperty channel="X" name="resolution" value="1000" units="1/cm"/>
+          <inkml:channelProperty channel="Y" name="resolution" value="1000" units="1/cm"/>
+          <inkml:channelProperty channel="F" name="resolution" value="0" units="1/dev"/>
+        </inkml:channelProperties>
+      </inkml:inkSource>
+      <inkml:timestamp xml:id="ts0" timeString="2026-05-09T20:03:48.799"/>
+    </inkml:context>
+    <inkml:brush xml:id="br0">
+      <inkml:brushProperty name="width" value="0.035" units="cm"/>
+      <inkml:brushProperty name="height" value="0.035" units="cm"/>
+    </inkml:brush>
+  </inkml:definitions>
+  <inkml:trace contextRef="#ctx0" brushRef="#br0">1 1 24575,'0'2'0,"0"1"0</inkml:trace>
+</inkml:ink>
+</file>
+
+<file path=ppt/ink/ink24.xml><?xml version="1.0" encoding="utf-8"?>
+<inkml:ink xmlns:inkml="http://www.w3.org/2003/InkML">
+  <inkml:definitions>
+    <inkml:context xml:id="ctx0">
+      <inkml:inkSource xml:id="inkSrc0">
+        <inkml:traceFormat>
+          <inkml:channel name="X" type="integer" min="-2.14748E9" max="2.14748E9" units="cm"/>
+          <inkml:channel name="Y" type="integer" min="-2.14748E9" max="2.14748E9" units="cm"/>
+          <inkml:channel name="F" type="integer" max="32767" units="dev"/>
+        </inkml:traceFormat>
+        <inkml:channelProperties>
+          <inkml:channelProperty channel="X" name="resolution" value="1000" units="1/cm"/>
+          <inkml:channelProperty channel="Y" name="resolution" value="1000" units="1/cm"/>
+          <inkml:channelProperty channel="F" name="resolution" value="0" units="1/dev"/>
+        </inkml:channelProperties>
+      </inkml:inkSource>
+      <inkml:timestamp xml:id="ts0" timeString="2026-05-09T20:03:49.359"/>
+    </inkml:context>
+    <inkml:brush xml:id="br0">
+      <inkml:brushProperty name="width" value="0.035" units="cm"/>
+      <inkml:brushProperty name="height" value="0.035" units="cm"/>
+    </inkml:brush>
+  </inkml:definitions>
+  <inkml:trace contextRef="#ctx0" brushRef="#br0">6 0 24575,'-3'7'0,"0"-2"0</inkml:trace>
+</inkml:ink>
+</file>
+
+<file path=ppt/ink/ink25.xml><?xml version="1.0" encoding="utf-8"?>
+<inkml:ink xmlns:inkml="http://www.w3.org/2003/InkML">
+  <inkml:definitions>
+    <inkml:context xml:id="ctx0">
+      <inkml:inkSource xml:id="inkSrc0">
+        <inkml:traceFormat>
+          <inkml:channel name="X" type="integer" min="-2.14748E9" max="2.14748E9" units="cm"/>
+          <inkml:channel name="Y" type="integer" min="-2.14748E9" max="2.14748E9" units="cm"/>
+          <inkml:channel name="F" type="integer" max="32767" units="dev"/>
+        </inkml:traceFormat>
+        <inkml:channelProperties>
+          <inkml:channelProperty channel="X" name="resolution" value="1000" units="1/cm"/>
+          <inkml:channelProperty channel="Y" name="resolution" value="1000" units="1/cm"/>
+          <inkml:channelProperty channel="F" name="resolution" value="0" units="1/dev"/>
+        </inkml:channelProperties>
+      </inkml:inkSource>
+      <inkml:timestamp xml:id="ts0" timeString="2026-05-09T20:03:49.748"/>
+    </inkml:context>
+    <inkml:brush xml:id="br0">
+      <inkml:brushProperty name="width" value="0.035" units="cm"/>
+      <inkml:brushProperty name="height" value="0.035" units="cm"/>
+    </inkml:brush>
+  </inkml:definitions>
+  <inkml:trace contextRef="#ctx0" brushRef="#br0">0 1 24575,'0'0'0</inkml:trace>
+</inkml:ink>
+</file>
+
+<file path=ppt/ink/ink26.xml><?xml version="1.0" encoding="utf-8"?>
 <inkml:ink xmlns:inkml="http://www.w3.org/2003/InkML">
   <inkml:definitions>
     <inkml:context xml:id="ctx0">
@@ -574,7 +655,7 @@
 </inkml:ink>
 </file>
 
-<file path=ppt/ink/ink24.xml><?xml version="1.0" encoding="utf-8"?>
+<file path=ppt/ink/ink27.xml><?xml version="1.0" encoding="utf-8"?>
 <inkml:ink xmlns:inkml="http://www.w3.org/2003/InkML">
   <inkml:definitions>
     <inkml:context xml:id="ctx0">
@@ -601,7 +682,7 @@
 </inkml:ink>
 </file>
 
-<file path=ppt/ink/ink25.xml><?xml version="1.0" encoding="utf-8"?>
+<file path=ppt/ink/ink28.xml><?xml version="1.0" encoding="utf-8"?>
 <inkml:ink xmlns:inkml="http://www.w3.org/2003/InkML">
   <inkml:definitions>
     <inkml:context xml:id="ctx0">
@@ -628,7 +709,7 @@
 </inkml:ink>
 </file>
 
-<file path=ppt/ink/ink26.xml><?xml version="1.0" encoding="utf-8"?>
+<file path=ppt/ink/ink29.xml><?xml version="1.0" encoding="utf-8"?>
 <inkml:ink xmlns:inkml="http://www.w3.org/2003/InkML">
   <inkml:definitions>
     <inkml:context xml:id="ctx0">
@@ -652,87 +733,6 @@
     </inkml:brush>
   </inkml:definitions>
   <inkml:trace contextRef="#ctx0" brushRef="#br0">1 650 24575,'10'-20'0,"58"-26"0,12 7 0,12-2 0,-22 11 0,3 0 0,3 1-2231,13-3 0,3 2 0,-3 1 2231,-13 5 0,-3 1 0,-3 2 0,18-5 0,-3 1 292,-2 2 1,-3 3-293,-10 3 0,-2 2 0,4-1 0,2 2 0,2 1 0,1 2 0,-4 0 0,-2 1 0,-6 4 0,-3 2 0,-5-1 0,-3 1 1331,25 0-1331,7 0 0,-13 1 0,-4 3 3435,-12-3-3435,-4-3 1342,-2 0-1342,-1-1 0,12 5 0,28 1 0,-28 1 0,4 0 0,3 0 0,0 0-1253,2 0 1,-1 0 1252,-10 0 0,-2 0 0,-4 0 0,-1 0 0,-1 0 0,-2 0 0,45 0 0,-1 3 0,-14 7 0,-4 5 0,-14 8 0,-6 5 0,-12 0 0,-8 1 2505,-13-4-2505,-11-2 0,-4-3 0,-2-1 0,5 1 0,5 2 0,1 4 0,-1-4 0,-2 0 0,-6-6 0,-2-2 0,-2 0 0,-4-3 0,0 1 0,0-1 0,2-2 0,1-11 0,-1-7 0,0-1 0,-2 0 0</inkml:trace>
-</inkml:ink>
-</file>
-
-<file path=ppt/ink/ink27.xml><?xml version="1.0" encoding="utf-8"?>
-<inkml:ink xmlns:inkml="http://www.w3.org/2003/InkML">
-  <inkml:definitions>
-    <inkml:context xml:id="ctx0">
-      <inkml:inkSource xml:id="inkSrc0">
-        <inkml:traceFormat>
-          <inkml:channel name="X" type="integer" min="-2.14748E9" max="2.14748E9" units="cm"/>
-          <inkml:channel name="Y" type="integer" min="-2.14748E9" max="2.14748E9" units="cm"/>
-          <inkml:channel name="F" type="integer" max="32767" units="dev"/>
-        </inkml:traceFormat>
-        <inkml:channelProperties>
-          <inkml:channelProperty channel="X" name="resolution" value="1000" units="1/cm"/>
-          <inkml:channelProperty channel="Y" name="resolution" value="1000" units="1/cm"/>
-          <inkml:channelProperty channel="F" name="resolution" value="0" units="1/dev"/>
-        </inkml:channelProperties>
-      </inkml:inkSource>
-      <inkml:timestamp xml:id="ts0" timeString="2026-05-09T20:03:39.399"/>
-    </inkml:context>
-    <inkml:brush xml:id="br0">
-      <inkml:brushProperty name="width" value="0.035" units="cm"/>
-      <inkml:brushProperty name="height" value="0.035" units="cm"/>
-    </inkml:brush>
-  </inkml:definitions>
-  <inkml:trace contextRef="#ctx0" brushRef="#br0">3322 0 24575,'-14'0'0,"-7"2"0,-13 4 0,-4 5 0,-5 6 0,-1 4 0,4-1 0,-4 1 0,-4-1 0,-9 1 0,-12 4 0,-10 5 0,0 3 0,2 2 0,9-3 0,13-5 0,6 0 0,4-1 0,-2 0 0,-7 2 0,-5 1 0,-8 8 0,-11 6 0,36-17 0,-1 0 0,-6 4 0,-1 0 0,-3 1 0,1 0 0,-1 4 0,0-1 0,1 1 0,-1-1 0,3 2 0,1-1 0,2-3 0,0-1 0,4-1 0,0-1 0,-31 26 0,14-8 0,10-3 0,7-6 0,0-1 0,-4 3 0,-5 4 0,-5 6 0,-3 3 0,0 0 0,4-3 0,2-3 0,8-7 0,5-3 0,7-3 0,5-4 0,4-3 0,2-3 0,2 0 0,0-1 0,2-2 0,-3 0 0,0-2 0,2 2 0,-1 1 0,2 1 0,-3 1 0,3-2 0,0 0 0,1-2 0,3-3 0,-1 2 0,1-2 0,3-1 0,-1-1 0,1 0 0,-1 0 0,0 2 0,0-2 0,0 0 0,0 0 0,2-2 0,-1 0 0,2-3 0,0-2 0,3-1 0,1-1 0,0 0 0,3 1 0,-1-2 0,1 3 0,0 0 0,-1 0 0,1 1 0,0 0 0,1-5 0,1 1 0,0-6 0</inkml:trace>
-</inkml:ink>
-</file>
-
-<file path=ppt/ink/ink28.xml><?xml version="1.0" encoding="utf-8"?>
-<inkml:ink xmlns:inkml="http://www.w3.org/2003/InkML">
-  <inkml:definitions>
-    <inkml:context xml:id="ctx0">
-      <inkml:inkSource xml:id="inkSrc0">
-        <inkml:traceFormat>
-          <inkml:channel name="X" type="integer" min="-2.14748E9" max="2.14748E9" units="cm"/>
-          <inkml:channel name="Y" type="integer" min="-2.14748E9" max="2.14748E9" units="cm"/>
-          <inkml:channel name="F" type="integer" max="32767" units="dev"/>
-        </inkml:traceFormat>
-        <inkml:channelProperties>
-          <inkml:channelProperty channel="X" name="resolution" value="1000" units="1/cm"/>
-          <inkml:channelProperty channel="Y" name="resolution" value="1000" units="1/cm"/>
-          <inkml:channelProperty channel="F" name="resolution" value="0" units="1/dev"/>
-        </inkml:channelProperties>
-      </inkml:inkSource>
-      <inkml:timestamp xml:id="ts0" timeString="2026-05-09T20:03:42.251"/>
-    </inkml:context>
-    <inkml:brush xml:id="br0">
-      <inkml:brushProperty name="width" value="0.035" units="cm"/>
-      <inkml:brushProperty name="height" value="0.035" units="cm"/>
-    </inkml:brush>
-  </inkml:definitions>
-  <inkml:trace contextRef="#ctx0" brushRef="#br0">0 1 24575,'17'0'0,"7"0"0,12 0 0,11 0 0,9 0 0,5 0 0,1 3 0,-2 5 0,-5 3 0,-10 2 0,-10-2 0,-9-4 0,-6 1 0,-3-3 0,-5 0 0,-3 0 0,-3-2 0,2-1 0,4-2 0,6 1 0,8-1 0,8 0 0,9 0 0,1 0 0,-3 0 0,-6 0 0,-7 0 0,-8 3 0,-6 4 0,-6 4 0,-4 1 0,-2-1 0,-2 0 0,0-2 0,-2 0 0,-1-1 0,-3-2 0,-4 0 0,-2 0 0,-3-1 0,-2 3 0,-2 4 0,-5 4 0,-3 3 0,-6 0 0,-3 4 0,-1 0 0,0 3 0,3-1 0,3-2 0,4-1 0,3-4 0,4 1 0,5-1 0,3-1 0,0-1 0,2-1 0,0 0 0,1-2 0,2 2 0,1-1 0,1 0 0,0 0 0,2-1 0,0-3 0,0 0 0,1-1 0,-1 0 0,0 3 0,3 3 0,0 0 0,0 1 0,0-1 0,0-8 0,0-2 0</inkml:trace>
-</inkml:ink>
-</file>
-
-<file path=ppt/ink/ink29.xml><?xml version="1.0" encoding="utf-8"?>
-<inkml:ink xmlns:inkml="http://www.w3.org/2003/InkML">
-  <inkml:definitions>
-    <inkml:context xml:id="ctx0">
-      <inkml:inkSource xml:id="inkSrc0">
-        <inkml:traceFormat>
-          <inkml:channel name="X" type="integer" min="-2.14748E9" max="2.14748E9" units="cm"/>
-          <inkml:channel name="Y" type="integer" min="-2.14748E9" max="2.14748E9" units="cm"/>
-          <inkml:channel name="F" type="integer" max="32767" units="dev"/>
-        </inkml:traceFormat>
-        <inkml:channelProperties>
-          <inkml:channelProperty channel="X" name="resolution" value="1000" units="1/cm"/>
-          <inkml:channelProperty channel="Y" name="resolution" value="1000" units="1/cm"/>
-          <inkml:channelProperty channel="F" name="resolution" value="0" units="1/dev"/>
-        </inkml:channelProperties>
-      </inkml:inkSource>
-      <inkml:timestamp xml:id="ts0" timeString="2026-05-09T20:03:48.799"/>
-    </inkml:context>
-    <inkml:brush xml:id="br0">
-      <inkml:brushProperty name="width" value="0.035" units="cm"/>
-      <inkml:brushProperty name="height" value="0.035" units="cm"/>
-    </inkml:brush>
-  </inkml:definitions>
-  <inkml:trace contextRef="#ctx0" brushRef="#br0">1 1 24575,'0'2'0,"0"1"0</inkml:trace>
 </inkml:ink>
 </file>
 
@@ -779,6 +779,33 @@
           <inkml:channelProperty channel="F" name="resolution" value="0" units="1/dev"/>
         </inkml:channelProperties>
       </inkml:inkSource>
+      <inkml:timestamp xml:id="ts0" timeString="2026-05-09T20:03:48.799"/>
+    </inkml:context>
+    <inkml:brush xml:id="br0">
+      <inkml:brushProperty name="width" value="0.035" units="cm"/>
+      <inkml:brushProperty name="height" value="0.035" units="cm"/>
+    </inkml:brush>
+  </inkml:definitions>
+  <inkml:trace contextRef="#ctx0" brushRef="#br0">1 1 24575,'0'2'0,"0"1"0</inkml:trace>
+</inkml:ink>
+</file>
+
+<file path=ppt/ink/ink31.xml><?xml version="1.0" encoding="utf-8"?>
+<inkml:ink xmlns:inkml="http://www.w3.org/2003/InkML">
+  <inkml:definitions>
+    <inkml:context xml:id="ctx0">
+      <inkml:inkSource xml:id="inkSrc0">
+        <inkml:traceFormat>
+          <inkml:channel name="X" type="integer" min="-2.14748E9" max="2.14748E9" units="cm"/>
+          <inkml:channel name="Y" type="integer" min="-2.14748E9" max="2.14748E9" units="cm"/>
+          <inkml:channel name="F" type="integer" max="32767" units="dev"/>
+        </inkml:traceFormat>
+        <inkml:channelProperties>
+          <inkml:channelProperty channel="X" name="resolution" value="1000" units="1/cm"/>
+          <inkml:channelProperty channel="Y" name="resolution" value="1000" units="1/cm"/>
+          <inkml:channelProperty channel="F" name="resolution" value="0" units="1/dev"/>
+        </inkml:channelProperties>
+      </inkml:inkSource>
       <inkml:timestamp xml:id="ts0" timeString="2026-05-09T20:03:49.359"/>
     </inkml:context>
     <inkml:brush xml:id="br0">
@@ -790,7 +817,7 @@
 </inkml:ink>
 </file>
 
-<file path=ppt/ink/ink31.xml><?xml version="1.0" encoding="utf-8"?>
+<file path=ppt/ink/ink32.xml><?xml version="1.0" encoding="utf-8"?>
 <inkml:ink xmlns:inkml="http://www.w3.org/2003/InkML">
   <inkml:definitions>
     <inkml:context xml:id="ctx0">
@@ -817,7 +844,7 @@
 </inkml:ink>
 </file>
 
-<file path=ppt/ink/ink32.xml><?xml version="1.0" encoding="utf-8"?>
+<file path=ppt/ink/ink33.xml><?xml version="1.0" encoding="utf-8"?>
 <inkml:ink xmlns:inkml="http://www.w3.org/2003/InkML">
   <inkml:definitions>
     <inkml:context xml:id="ctx0">
@@ -844,7 +871,7 @@
 </inkml:ink>
 </file>
 
-<file path=ppt/ink/ink33.xml><?xml version="1.0" encoding="utf-8"?>
+<file path=ppt/ink/ink34.xml><?xml version="1.0" encoding="utf-8"?>
 <inkml:ink xmlns:inkml="http://www.w3.org/2003/InkML">
   <inkml:definitions>
     <inkml:context xml:id="ctx0">
@@ -871,7 +898,7 @@
 </inkml:ink>
 </file>
 
-<file path=ppt/ink/ink34.xml><?xml version="1.0" encoding="utf-8"?>
+<file path=ppt/ink/ink35.xml><?xml version="1.0" encoding="utf-8"?>
 <inkml:ink xmlns:inkml="http://www.w3.org/2003/InkML">
   <inkml:definitions>
     <inkml:context xml:id="ctx0">
@@ -898,7 +925,7 @@
 </inkml:ink>
 </file>
 
-<file path=ppt/ink/ink35.xml><?xml version="1.0" encoding="utf-8"?>
+<file path=ppt/ink/ink36.xml><?xml version="1.0" encoding="utf-8"?>
 <inkml:ink xmlns:inkml="http://www.w3.org/2003/InkML">
   <inkml:definitions>
     <inkml:context xml:id="ctx0">
@@ -925,7 +952,7 @@
 </inkml:ink>
 </file>
 
-<file path=ppt/ink/ink36.xml><?xml version="1.0" encoding="utf-8"?>
+<file path=ppt/ink/ink37.xml><?xml version="1.0" encoding="utf-8"?>
 <inkml:ink xmlns:inkml="http://www.w3.org/2003/InkML">
   <inkml:definitions>
     <inkml:context xml:id="ctx0">
@@ -952,7 +979,7 @@
 </inkml:ink>
 </file>
 
-<file path=ppt/ink/ink37.xml><?xml version="1.0" encoding="utf-8"?>
+<file path=ppt/ink/ink38.xml><?xml version="1.0" encoding="utf-8"?>
 <inkml:ink xmlns:inkml="http://www.w3.org/2003/InkML">
   <inkml:definitions>
     <inkml:context xml:id="ctx0">
@@ -979,7 +1006,7 @@
 </inkml:ink>
 </file>
 
-<file path=ppt/ink/ink38.xml><?xml version="1.0" encoding="utf-8"?>
+<file path=ppt/ink/ink39.xml><?xml version="1.0" encoding="utf-8"?>
 <inkml:ink xmlns:inkml="http://www.w3.org/2003/InkML">
   <inkml:definitions>
     <inkml:context xml:id="ctx0">
@@ -1003,33 +1030,6 @@
     </inkml:brush>
   </inkml:definitions>
   <inkml:trace contextRef="#ctx0" brushRef="#br0">0 1 24575,'0'0'0</inkml:trace>
-</inkml:ink>
-</file>
-
-<file path=ppt/ink/ink39.xml><?xml version="1.0" encoding="utf-8"?>
-<inkml:ink xmlns:inkml="http://www.w3.org/2003/InkML">
-  <inkml:definitions>
-    <inkml:context xml:id="ctx0">
-      <inkml:inkSource xml:id="inkSrc0">
-        <inkml:traceFormat>
-          <inkml:channel name="X" type="integer" min="-2.14748E9" max="2.14748E9" units="cm"/>
-          <inkml:channel name="Y" type="integer" min="-2.14748E9" max="2.14748E9" units="cm"/>
-          <inkml:channel name="F" type="integer" max="32767" units="dev"/>
-        </inkml:traceFormat>
-        <inkml:channelProperties>
-          <inkml:channelProperty channel="X" name="resolution" value="1000" units="1/cm"/>
-          <inkml:channelProperty channel="Y" name="resolution" value="1000" units="1/cm"/>
-          <inkml:channelProperty channel="F" name="resolution" value="0" units="1/dev"/>
-        </inkml:channelProperties>
-      </inkml:inkSource>
-      <inkml:timestamp xml:id="ts0" timeString="2026-05-08T08:26:26.490"/>
-    </inkml:context>
-    <inkml:brush xml:id="br0">
-      <inkml:brushProperty name="width" value="0.035" units="cm"/>
-      <inkml:brushProperty name="height" value="0.035" units="cm"/>
-    </inkml:brush>
-  </inkml:definitions>
-  <inkml:trace contextRef="#ctx0" brushRef="#br0">0 1 18188,'3'3'0,"-1"-1"0</inkml:trace>
 </inkml:ink>
 </file>
 
@@ -1076,14 +1076,15 @@
           <inkml:channelProperty channel="F" name="resolution" value="0" units="1/dev"/>
         </inkml:channelProperties>
       </inkml:inkSource>
-      <inkml:timestamp xml:id="ts0" timeString="2026-05-08T08:26:27.249"/>
+      <inkml:timestamp xml:id="ts0" timeString="2026-05-09T19:01:37.110"/>
     </inkml:context>
     <inkml:brush xml:id="br0">
-      <inkml:brushProperty name="width" value="0.035" units="cm"/>
-      <inkml:brushProperty name="height" value="0.035" units="cm"/>
+      <inkml:brushProperty name="width" value="0.05" units="cm"/>
+      <inkml:brushProperty name="height" value="0.05" units="cm"/>
+      <inkml:brushProperty name="color" value="#66CC00"/>
     </inkml:brush>
   </inkml:definitions>
-  <inkml:trace contextRef="#ctx0" brushRef="#br0">6 0 22690,'-3'0'0,"1"0"0</inkml:trace>
+  <inkml:trace contextRef="#ctx0" brushRef="#br0">0 1 24575,'11'23'0,"5"3"0,5 4 0,6 5 0,1 4 0,3 1 0,1 4 0,0 0 0,-4 0 0,-3-3 0,-2-2 0,-4-3 0,1 1 0,3 3 0,0 0 0,1-1 0,-1-1 0,-7-7 0,-4-5 0,-5-5 0,-3-3 0,-1 1 0,-1 2 0,3 0 0,1 1 0,2-2 0,-2-2 0,0-3 0,2-4 0,0-5 0,-3-5 0,-1-1 0</inkml:trace>
 </inkml:ink>
 </file>
 
@@ -1103,126 +1104,19 @@
           <inkml:channelProperty channel="F" name="resolution" value="0" units="1/dev"/>
         </inkml:channelProperties>
       </inkml:inkSource>
-      <inkml:timestamp xml:id="ts0" timeString="2026-05-08T08:26:27.774"/>
+      <inkml:timestamp xml:id="ts0" timeString="2026-05-09T19:01:39.270"/>
     </inkml:context>
     <inkml:brush xml:id="br0">
-      <inkml:brushProperty name="width" value="0.035" units="cm"/>
-      <inkml:brushProperty name="height" value="0.035" units="cm"/>
+      <inkml:brushProperty name="width" value="0.05" units="cm"/>
+      <inkml:brushProperty name="height" value="0.05" units="cm"/>
+      <inkml:brushProperty name="color" value="#66CC00"/>
     </inkml:brush>
   </inkml:definitions>
-  <inkml:trace contextRef="#ctx0" brushRef="#br0">1 0 24575,'0'0'0</inkml:trace>
+  <inkml:trace contextRef="#ctx0" brushRef="#br0">0 95 24575,'23'0'0,"10"0"0,25 0 0,10 0 0,4 0 0,-6 0 0,-14 0 0,-6 0 0,-9 0 0,-6 0 0,-7 0 0,-5 0 0,-4 0 0,-2 0 0,-1 0 0,-2 0 0,1-3 0,2-2 0,2-2 0,7-4 0,7 0 0,10 0 0,4 1 0,1 1 0,-7-1 0,-7 2 0,-6 2 0,-6 3 0,-3 3 0,-2 0 0,-2 0 0,-1 0 0,2 0 0,1 0 0,2 0 0,8 0 0,9 0 0,6 0 0,5 0 0,0 0 0,-8 0 0,-5 0 0,-7 0 0,-5 0 0,1 0 0,2 0 0,5 0 0,3 0 0,2 0 0,-3 0 0,-5 0 0,-2 0 0,-5 0 0,-1 0 0,-2 0 0,-6 0 0,-1 0 0</inkml:trace>
 </inkml:ink>
 </file>
 
 <file path=ppt/ink/ink42.xml><?xml version="1.0" encoding="utf-8"?>
-<inkml:ink xmlns:inkml="http://www.w3.org/2003/InkML">
-  <inkml:definitions>
-    <inkml:context xml:id="ctx0">
-      <inkml:inkSource xml:id="inkSrc0">
-        <inkml:traceFormat>
-          <inkml:channel name="X" type="integer" min="-2.14748E9" max="2.14748E9" units="cm"/>
-          <inkml:channel name="Y" type="integer" min="-2.14748E9" max="2.14748E9" units="cm"/>
-          <inkml:channel name="F" type="integer" max="32767" units="dev"/>
-        </inkml:traceFormat>
-        <inkml:channelProperties>
-          <inkml:channelProperty channel="X" name="resolution" value="1000" units="1/cm"/>
-          <inkml:channelProperty channel="Y" name="resolution" value="1000" units="1/cm"/>
-          <inkml:channelProperty channel="F" name="resolution" value="0" units="1/dev"/>
-        </inkml:channelProperties>
-      </inkml:inkSource>
-      <inkml:timestamp xml:id="ts0" timeString="2026-05-08T08:26:20.754"/>
-    </inkml:context>
-    <inkml:brush xml:id="br0">
-      <inkml:brushProperty name="width" value="0.035" units="cm"/>
-      <inkml:brushProperty name="height" value="0.035" units="cm"/>
-    </inkml:brush>
-  </inkml:definitions>
-  <inkml:trace contextRef="#ctx0" brushRef="#br0">1 650 24575,'10'-20'0,"58"-26"0,12 7 0,12-2 0,-22 11 0,3 0 0,3 1-2231,13-3 0,3 2 0,-3 1 2231,-13 5 0,-3 1 0,-3 2 0,18-5 0,-3 1 292,-2 2 1,-3 3-293,-10 3 0,-2 2 0,4-1 0,2 2 0,2 1 0,1 2 0,-4 0 0,-2 1 0,-6 4 0,-3 2 0,-5-1 0,-3 1 1331,25 0-1331,7 0 0,-13 1 0,-4 3 3435,-12-3-3435,-4-3 1342,-2 0-1342,-1-1 0,12 5 0,28 1 0,-28 1 0,4 0 0,3 0 0,0 0-1253,2 0 1,-1 0 1252,-10 0 0,-2 0 0,-4 0 0,-1 0 0,-1 0 0,-2 0 0,45 0 0,-1 3 0,-14 7 0,-4 5 0,-14 8 0,-6 5 0,-12 0 0,-8 1 2505,-13-4-2505,-11-2 0,-4-3 0,-2-1 0,5 1 0,5 2 0,1 4 0,-1-4 0,-2 0 0,-6-6 0,-2-2 0,-2 0 0,-4-3 0,0 1 0,0-1 0,2-2 0,1-11 0,-1-7 0,0-1 0,-2 0 0</inkml:trace>
-</inkml:ink>
-</file>
-
-<file path=ppt/ink/ink43.xml><?xml version="1.0" encoding="utf-8"?>
-<inkml:ink xmlns:inkml="http://www.w3.org/2003/InkML">
-  <inkml:definitions>
-    <inkml:context xml:id="ctx0">
-      <inkml:inkSource xml:id="inkSrc0">
-        <inkml:traceFormat>
-          <inkml:channel name="X" type="integer" min="-2.14748E9" max="2.14748E9" units="cm"/>
-          <inkml:channel name="Y" type="integer" min="-2.14748E9" max="2.14748E9" units="cm"/>
-          <inkml:channel name="F" type="integer" max="32767" units="dev"/>
-        </inkml:traceFormat>
-        <inkml:channelProperties>
-          <inkml:channelProperty channel="X" name="resolution" value="1000" units="1/cm"/>
-          <inkml:channelProperty channel="Y" name="resolution" value="1000" units="1/cm"/>
-          <inkml:channelProperty channel="F" name="resolution" value="0" units="1/dev"/>
-        </inkml:channelProperties>
-      </inkml:inkSource>
-      <inkml:timestamp xml:id="ts0" timeString="2026-05-09T20:03:48.799"/>
-    </inkml:context>
-    <inkml:brush xml:id="br0">
-      <inkml:brushProperty name="width" value="0.035" units="cm"/>
-      <inkml:brushProperty name="height" value="0.035" units="cm"/>
-    </inkml:brush>
-  </inkml:definitions>
-  <inkml:trace contextRef="#ctx0" brushRef="#br0">1 1 24575,'0'2'0,"0"1"0</inkml:trace>
-</inkml:ink>
-</file>
-
-<file path=ppt/ink/ink44.xml><?xml version="1.0" encoding="utf-8"?>
-<inkml:ink xmlns:inkml="http://www.w3.org/2003/InkML">
-  <inkml:definitions>
-    <inkml:context xml:id="ctx0">
-      <inkml:inkSource xml:id="inkSrc0">
-        <inkml:traceFormat>
-          <inkml:channel name="X" type="integer" min="-2.14748E9" max="2.14748E9" units="cm"/>
-          <inkml:channel name="Y" type="integer" min="-2.14748E9" max="2.14748E9" units="cm"/>
-          <inkml:channel name="F" type="integer" max="32767" units="dev"/>
-        </inkml:traceFormat>
-        <inkml:channelProperties>
-          <inkml:channelProperty channel="X" name="resolution" value="1000" units="1/cm"/>
-          <inkml:channelProperty channel="Y" name="resolution" value="1000" units="1/cm"/>
-          <inkml:channelProperty channel="F" name="resolution" value="0" units="1/dev"/>
-        </inkml:channelProperties>
-      </inkml:inkSource>
-      <inkml:timestamp xml:id="ts0" timeString="2026-05-09T20:03:49.359"/>
-    </inkml:context>
-    <inkml:brush xml:id="br0">
-      <inkml:brushProperty name="width" value="0.035" units="cm"/>
-      <inkml:brushProperty name="height" value="0.035" units="cm"/>
-    </inkml:brush>
-  </inkml:definitions>
-  <inkml:trace contextRef="#ctx0" brushRef="#br0">6 0 24575,'-3'7'0,"0"-2"0</inkml:trace>
-</inkml:ink>
-</file>
-
-<file path=ppt/ink/ink45.xml><?xml version="1.0" encoding="utf-8"?>
-<inkml:ink xmlns:inkml="http://www.w3.org/2003/InkML">
-  <inkml:definitions>
-    <inkml:context xml:id="ctx0">
-      <inkml:inkSource xml:id="inkSrc0">
-        <inkml:traceFormat>
-          <inkml:channel name="X" type="integer" min="-2.14748E9" max="2.14748E9" units="cm"/>
-          <inkml:channel name="Y" type="integer" min="-2.14748E9" max="2.14748E9" units="cm"/>
-          <inkml:channel name="F" type="integer" max="32767" units="dev"/>
-        </inkml:traceFormat>
-        <inkml:channelProperties>
-          <inkml:channelProperty channel="X" name="resolution" value="1000" units="1/cm"/>
-          <inkml:channelProperty channel="Y" name="resolution" value="1000" units="1/cm"/>
-          <inkml:channelProperty channel="F" name="resolution" value="0" units="1/dev"/>
-        </inkml:channelProperties>
-      </inkml:inkSource>
-      <inkml:timestamp xml:id="ts0" timeString="2026-05-09T20:03:49.748"/>
-    </inkml:context>
-    <inkml:brush xml:id="br0">
-      <inkml:brushProperty name="width" value="0.035" units="cm"/>
-      <inkml:brushProperty name="height" value="0.035" units="cm"/>
-    </inkml:brush>
-  </inkml:definitions>
-  <inkml:trace contextRef="#ctx0" brushRef="#br0">0 1 24575,'0'0'0</inkml:trace>
-</inkml:ink>
-</file>
-
-<file path=ppt/ink/ink46.xml><?xml version="1.0" encoding="utf-8"?>
 <inkml:ink xmlns:inkml="http://www.w3.org/2003/InkML">
   <inkml:definitions>
     <inkml:context xml:id="ctx0">
@@ -1250,63 +1144,7 @@
 </inkml:ink>
 </file>
 
-<file path=ppt/ink/ink47.xml><?xml version="1.0" encoding="utf-8"?>
-<inkml:ink xmlns:inkml="http://www.w3.org/2003/InkML">
-  <inkml:definitions>
-    <inkml:context xml:id="ctx0">
-      <inkml:inkSource xml:id="inkSrc0">
-        <inkml:traceFormat>
-          <inkml:channel name="X" type="integer" min="-2.14748E9" max="2.14748E9" units="cm"/>
-          <inkml:channel name="Y" type="integer" min="-2.14748E9" max="2.14748E9" units="cm"/>
-          <inkml:channel name="F" type="integer" max="32767" units="dev"/>
-        </inkml:traceFormat>
-        <inkml:channelProperties>
-          <inkml:channelProperty channel="X" name="resolution" value="1000" units="1/cm"/>
-          <inkml:channelProperty channel="Y" name="resolution" value="1000" units="1/cm"/>
-          <inkml:channelProperty channel="F" name="resolution" value="0" units="1/dev"/>
-        </inkml:channelProperties>
-      </inkml:inkSource>
-      <inkml:timestamp xml:id="ts0" timeString="2026-05-09T19:01:39.270"/>
-    </inkml:context>
-    <inkml:brush xml:id="br0">
-      <inkml:brushProperty name="width" value="0.05" units="cm"/>
-      <inkml:brushProperty name="height" value="0.05" units="cm"/>
-      <inkml:brushProperty name="color" value="#66CC00"/>
-    </inkml:brush>
-  </inkml:definitions>
-  <inkml:trace contextRef="#ctx0" brushRef="#br0">0 95 24575,'23'0'0,"10"0"0,25 0 0,10 0 0,4 0 0,-6 0 0,-14 0 0,-6 0 0,-9 0 0,-6 0 0,-7 0 0,-5 0 0,-4 0 0,-2 0 0,-1 0 0,-2 0 0,1-3 0,2-2 0,2-2 0,7-4 0,7 0 0,10 0 0,4 1 0,1 1 0,-7-1 0,-7 2 0,-6 2 0,-6 3 0,-3 3 0,-2 0 0,-2 0 0,-1 0 0,2 0 0,1 0 0,2 0 0,8 0 0,9 0 0,6 0 0,5 0 0,0 0 0,-8 0 0,-5 0 0,-7 0 0,-5 0 0,1 0 0,2 0 0,5 0 0,3 0 0,2 0 0,-3 0 0,-5 0 0,-2 0 0,-5 0 0,-1 0 0,-2 0 0,-6 0 0,-1 0 0</inkml:trace>
-</inkml:ink>
-</file>
-
-<file path=ppt/ink/ink48.xml><?xml version="1.0" encoding="utf-8"?>
-<inkml:ink xmlns:inkml="http://www.w3.org/2003/InkML">
-  <inkml:definitions>
-    <inkml:context xml:id="ctx0">
-      <inkml:inkSource xml:id="inkSrc0">
-        <inkml:traceFormat>
-          <inkml:channel name="X" type="integer" min="-2.14748E9" max="2.14748E9" units="cm"/>
-          <inkml:channel name="Y" type="integer" min="-2.14748E9" max="2.14748E9" units="cm"/>
-          <inkml:channel name="F" type="integer" max="32767" units="dev"/>
-        </inkml:traceFormat>
-        <inkml:channelProperties>
-          <inkml:channelProperty channel="X" name="resolution" value="1000" units="1/cm"/>
-          <inkml:channelProperty channel="Y" name="resolution" value="1000" units="1/cm"/>
-          <inkml:channelProperty channel="F" name="resolution" value="0" units="1/dev"/>
-        </inkml:channelProperties>
-      </inkml:inkSource>
-      <inkml:timestamp xml:id="ts0" timeString="2026-05-09T19:01:37.110"/>
-    </inkml:context>
-    <inkml:brush xml:id="br0">
-      <inkml:brushProperty name="width" value="0.05" units="cm"/>
-      <inkml:brushProperty name="height" value="0.05" units="cm"/>
-      <inkml:brushProperty name="color" value="#66CC00"/>
-    </inkml:brush>
-  </inkml:definitions>
-  <inkml:trace contextRef="#ctx0" brushRef="#br0">0 1 24575,'11'23'0,"5"3"0,5 4 0,6 5 0,1 4 0,3 1 0,1 4 0,0 0 0,-4 0 0,-3-3 0,-2-2 0,-4-3 0,1 1 0,3 3 0,0 0 0,1-1 0,-1-1 0,-7-7 0,-4-5 0,-5-5 0,-3-3 0,-1 1 0,-1 2 0,3 0 0,1 1 0,2-2 0,-2-2 0,0-3 0,2-4 0,0-5 0,-3-5 0,-1-1 0</inkml:trace>
-</inkml:ink>
-</file>
-
-<file path=ppt/ink/ink49.xml><?xml version="1.0" encoding="utf-8"?>
+<file path=ppt/ink/ink43.xml><?xml version="1.0" encoding="utf-8"?>
 <inkml:ink xmlns:inkml="http://www.w3.org/2003/InkML">
   <inkml:definitions>
     <inkml:context xml:id="ctx0">
@@ -1551,7 +1389,7 @@
           <a:p>
             <a:fld id="{2385FAEB-7465-8C4A-80F8-8997C446ABDB}" type="datetimeFigureOut">
               <a:rPr kumimoji="1" lang="ja-JP" altLang="en-US" smtClean="0"/>
-              <a:t>2026/5/21</a:t>
+              <a:t>2026/6/18</a:t>
             </a:fld>
             <a:endParaRPr kumimoji="1" lang="ja-JP" altLang="en-US"/>
           </a:p>
@@ -5120,7 +4958,7 @@
           <a:p>
             <a:fld id="{38964EF6-9EF5-A449-B2D6-E896714761EF}" type="datetimeFigureOut">
               <a:rPr kumimoji="1" lang="ja-JP" altLang="en-US" smtClean="0"/>
-              <a:t>2026/5/21</a:t>
+              <a:t>2026/6/18</a:t>
             </a:fld>
             <a:endParaRPr kumimoji="1" lang="ja-JP" altLang="en-US"/>
           </a:p>
@@ -5350,7 +5188,7 @@
           <a:p>
             <a:fld id="{38964EF6-9EF5-A449-B2D6-E896714761EF}" type="datetimeFigureOut">
               <a:rPr kumimoji="1" lang="ja-JP" altLang="en-US" smtClean="0"/>
-              <a:t>2026/5/21</a:t>
+              <a:t>2026/6/18</a:t>
             </a:fld>
             <a:endParaRPr kumimoji="1" lang="ja-JP" altLang="en-US"/>
           </a:p>
@@ -5590,7 +5428,7 @@
           <a:p>
             <a:fld id="{38964EF6-9EF5-A449-B2D6-E896714761EF}" type="datetimeFigureOut">
               <a:rPr kumimoji="1" lang="ja-JP" altLang="en-US" smtClean="0"/>
-              <a:t>2026/5/21</a:t>
+              <a:t>2026/6/18</a:t>
             </a:fld>
             <a:endParaRPr kumimoji="1" lang="ja-JP" altLang="en-US"/>
           </a:p>
@@ -5820,7 +5658,7 @@
           <a:p>
             <a:fld id="{38964EF6-9EF5-A449-B2D6-E896714761EF}" type="datetimeFigureOut">
               <a:rPr kumimoji="1" lang="ja-JP" altLang="en-US" smtClean="0"/>
-              <a:t>2026/5/21</a:t>
+              <a:t>2026/6/18</a:t>
             </a:fld>
             <a:endParaRPr kumimoji="1" lang="ja-JP" altLang="en-US"/>
           </a:p>
@@ -6095,7 +5933,7 @@
           <a:p>
             <a:fld id="{38964EF6-9EF5-A449-B2D6-E896714761EF}" type="datetimeFigureOut">
               <a:rPr kumimoji="1" lang="ja-JP" altLang="en-US" smtClean="0"/>
-              <a:t>2026/5/21</a:t>
+              <a:t>2026/6/18</a:t>
             </a:fld>
             <a:endParaRPr kumimoji="1" lang="ja-JP" altLang="en-US"/>
           </a:p>
@@ -6424,7 +6262,7 @@
           <a:p>
             <a:fld id="{38964EF6-9EF5-A449-B2D6-E896714761EF}" type="datetimeFigureOut">
               <a:rPr kumimoji="1" lang="ja-JP" altLang="en-US" smtClean="0"/>
-              <a:t>2026/5/21</a:t>
+              <a:t>2026/6/18</a:t>
             </a:fld>
             <a:endParaRPr kumimoji="1" lang="ja-JP" altLang="en-US"/>
           </a:p>
@@ -6900,7 +6738,7 @@
           <a:p>
             <a:fld id="{38964EF6-9EF5-A449-B2D6-E896714761EF}" type="datetimeFigureOut">
               <a:rPr kumimoji="1" lang="ja-JP" altLang="en-US" smtClean="0"/>
-              <a:t>2026/5/21</a:t>
+              <a:t>2026/6/18</a:t>
             </a:fld>
             <a:endParaRPr kumimoji="1" lang="ja-JP" altLang="en-US"/>
           </a:p>
@@ -7041,7 +6879,7 @@
           <a:p>
             <a:fld id="{38964EF6-9EF5-A449-B2D6-E896714761EF}" type="datetimeFigureOut">
               <a:rPr kumimoji="1" lang="ja-JP" altLang="en-US" smtClean="0"/>
-              <a:t>2026/5/21</a:t>
+              <a:t>2026/6/18</a:t>
             </a:fld>
             <a:endParaRPr kumimoji="1" lang="ja-JP" altLang="en-US"/>
           </a:p>
@@ -7154,7 +6992,7 @@
           <a:p>
             <a:fld id="{38964EF6-9EF5-A449-B2D6-E896714761EF}" type="datetimeFigureOut">
               <a:rPr kumimoji="1" lang="ja-JP" altLang="en-US" smtClean="0"/>
-              <a:t>2026/5/21</a:t>
+              <a:t>2026/6/18</a:t>
             </a:fld>
             <a:endParaRPr kumimoji="1" lang="ja-JP" altLang="en-US"/>
           </a:p>
@@ -7497,7 +7335,7 @@
           <a:p>
             <a:fld id="{38964EF6-9EF5-A449-B2D6-E896714761EF}" type="datetimeFigureOut">
               <a:rPr kumimoji="1" lang="ja-JP" altLang="en-US" smtClean="0"/>
-              <a:t>2026/5/21</a:t>
+              <a:t>2026/6/18</a:t>
             </a:fld>
             <a:endParaRPr kumimoji="1" lang="ja-JP" altLang="en-US"/>
           </a:p>
@@ -7785,7 +7623,7 @@
           <a:p>
             <a:fld id="{38964EF6-9EF5-A449-B2D6-E896714761EF}" type="datetimeFigureOut">
               <a:rPr kumimoji="1" lang="ja-JP" altLang="en-US" smtClean="0"/>
-              <a:t>2026/5/21</a:t>
+              <a:t>2026/6/18</a:t>
             </a:fld>
             <a:endParaRPr kumimoji="1" lang="ja-JP" altLang="en-US"/>
           </a:p>
@@ -8058,7 +7896,7 @@
           <a:p>
             <a:fld id="{38964EF6-9EF5-A449-B2D6-E896714761EF}" type="datetimeFigureOut">
               <a:rPr kumimoji="1" lang="ja-JP" altLang="en-US" smtClean="0"/>
-              <a:t>2026/5/21</a:t>
+              <a:t>2026/6/18</a:t>
             </a:fld>
             <a:endParaRPr kumimoji="1" lang="ja-JP" altLang="en-US"/>
           </a:p>
@@ -12728,12 +12566,25 @@
         </p:nvSpPr>
         <p:spPr>
           <a:xfrm>
-            <a:off x="7985760" y="3032760"/>
+            <a:off x="7479614" y="2940357"/>
             <a:ext cx="1219200" cy="731520"/>
           </a:xfrm>
           <a:prstGeom prst="roundRect">
             <a:avLst/>
           </a:prstGeom>
+          <a:solidFill>
+            <a:schemeClr val="accent2">
+              <a:lumMod val="40000"/>
+              <a:lumOff val="60000"/>
+            </a:schemeClr>
+          </a:solidFill>
+          <a:ln>
+            <a:solidFill>
+              <a:schemeClr val="accent2">
+                <a:lumMod val="75000"/>
+              </a:schemeClr>
+            </a:solidFill>
+          </a:ln>
         </p:spPr>
         <p:style>
           <a:lnRef idx="2">
@@ -12757,15 +12608,27 @@
           <a:p>
             <a:pPr algn="ctr"/>
             <a:r>
-              <a:rPr kumimoji="1" lang="ja-JP" altLang="en-US"/>
+              <a:rPr kumimoji="1" lang="ja-JP" altLang="en-US">
+                <a:solidFill>
+                  <a:srgbClr val="FF0000"/>
+                </a:solidFill>
+              </a:rPr>
               <a:t>加速度</a:t>
             </a:r>
-            <a:endParaRPr kumimoji="1" lang="en-US" altLang="ja-JP" dirty="0"/>
+            <a:endParaRPr kumimoji="1" lang="en-US" altLang="ja-JP" dirty="0">
+              <a:solidFill>
+                <a:srgbClr val="FF0000"/>
+              </a:solidFill>
+            </a:endParaRPr>
           </a:p>
           <a:p>
             <a:pPr algn="ctr"/>
             <a:r>
-              <a:rPr kumimoji="1" lang="ja-JP" altLang="en-US"/>
+              <a:rPr kumimoji="1" lang="ja-JP" altLang="en-US">
+                <a:solidFill>
+                  <a:srgbClr val="FF0000"/>
+                </a:solidFill>
+              </a:rPr>
               <a:t>センサ</a:t>
             </a:r>
           </a:p>
@@ -12785,8 +12648,8 @@
         </p:nvSpPr>
         <p:spPr>
           <a:xfrm>
-            <a:off x="2606040" y="2941320"/>
-            <a:ext cx="6934200" cy="914400"/>
+            <a:off x="2606040" y="2379472"/>
+            <a:ext cx="6934200" cy="1823560"/>
           </a:xfrm>
           <a:prstGeom prst="rect">
             <a:avLst/>
@@ -12832,12 +12695,26 @@
         </p:nvSpPr>
         <p:spPr>
           <a:xfrm>
-            <a:off x="5791200" y="3079396"/>
-            <a:ext cx="1219200" cy="731520"/>
+            <a:off x="624840" y="2771119"/>
+            <a:ext cx="1771650" cy="1069997"/>
           </a:xfrm>
           <a:prstGeom prst="roundRect">
             <a:avLst/>
           </a:prstGeom>
+          <a:solidFill>
+            <a:schemeClr val="accent4">
+              <a:lumMod val="20000"/>
+              <a:lumOff val="80000"/>
+            </a:schemeClr>
+          </a:solidFill>
+          <a:ln>
+            <a:solidFill>
+              <a:schemeClr val="accent4">
+                <a:lumMod val="40000"/>
+                <a:lumOff val="60000"/>
+              </a:schemeClr>
+            </a:solidFill>
+          </a:ln>
         </p:spPr>
         <p:style>
           <a:lnRef idx="2">
@@ -12861,60 +12738,24 @@
           <a:p>
             <a:pPr algn="ctr"/>
             <a:r>
-              <a:rPr lang="en-US" altLang="ja-JP" dirty="0"/>
+              <a:rPr lang="en-US" altLang="ja-JP" dirty="0">
+                <a:solidFill>
+                  <a:schemeClr val="accent1">
+                    <a:lumMod val="60000"/>
+                    <a:lumOff val="40000"/>
+                  </a:schemeClr>
+                </a:solidFill>
+              </a:rPr>
               <a:t>Arduino</a:t>
             </a:r>
-            <a:endParaRPr kumimoji="1" lang="en-US" altLang="ja-JP" dirty="0"/>
-          </a:p>
-        </p:txBody>
-      </p:sp>
-      <p:sp>
-        <p:nvSpPr>
-          <p:cNvPr id="7" name="角丸四角形 6">
-            <a:extLst>
-              <a:ext uri="{FF2B5EF4-FFF2-40B4-BE49-F238E27FC236}">
-                <a16:creationId xmlns:a16="http://schemas.microsoft.com/office/drawing/2014/main" id="{8C059789-7DEA-F4F6-8CEC-7A2B2EA80731}"/>
-              </a:ext>
-            </a:extLst>
-          </p:cNvPr>
-          <p:cNvSpPr/>
-          <p:nvPr/>
-        </p:nvSpPr>
-        <p:spPr>
-          <a:xfrm>
-            <a:off x="944880" y="2941320"/>
-            <a:ext cx="1661160" cy="914400"/>
-          </a:xfrm>
-          <a:prstGeom prst="roundRect">
-            <a:avLst/>
-          </a:prstGeom>
-        </p:spPr>
-        <p:style>
-          <a:lnRef idx="2">
-            <a:schemeClr val="accent1">
-              <a:shade val="15000"/>
-            </a:schemeClr>
-          </a:lnRef>
-          <a:fillRef idx="1">
-            <a:schemeClr val="accent1"/>
-          </a:fillRef>
-          <a:effectRef idx="0">
-            <a:schemeClr val="accent1"/>
-          </a:effectRef>
-          <a:fontRef idx="minor">
-            <a:schemeClr val="lt1"/>
-          </a:fontRef>
-        </p:style>
-        <p:txBody>
-          <a:bodyPr rtlCol="0" anchor="ctr"/>
-          <a:lstStyle/>
-          <a:p>
-            <a:pPr algn="ctr"/>
-            <a:r>
-              <a:rPr lang="ja-JP" altLang="en-US"/>
-              <a:t>外部電源</a:t>
-            </a:r>
-            <a:endParaRPr kumimoji="1" lang="en-US" altLang="ja-JP" dirty="0"/>
+            <a:endParaRPr kumimoji="1" lang="en-US" altLang="ja-JP" dirty="0">
+              <a:solidFill>
+                <a:schemeClr val="accent1">
+                  <a:lumMod val="60000"/>
+                  <a:lumOff val="40000"/>
+                </a:schemeClr>
+              </a:solidFill>
+            </a:endParaRPr>
           </a:p>
         </p:txBody>
       </p:sp>
@@ -12932,12 +12773,26 @@
         </p:nvSpPr>
         <p:spPr>
           <a:xfrm>
-            <a:off x="2987040" y="3058326"/>
+            <a:off x="2815590" y="3306118"/>
             <a:ext cx="2026920" cy="731520"/>
           </a:xfrm>
           <a:prstGeom prst="roundRect">
             <a:avLst/>
           </a:prstGeom>
+          <a:solidFill>
+            <a:schemeClr val="accent6">
+              <a:lumMod val="60000"/>
+              <a:lumOff val="40000"/>
+            </a:schemeClr>
+          </a:solidFill>
+          <a:ln>
+            <a:solidFill>
+              <a:schemeClr val="accent6">
+                <a:lumMod val="60000"/>
+                <a:lumOff val="40000"/>
+              </a:schemeClr>
+            </a:solidFill>
+          </a:ln>
         </p:spPr>
         <p:style>
           <a:lnRef idx="2">
@@ -12970,10 +12825,10 @@
       </p:sp>
       <p:sp>
         <p:nvSpPr>
-          <p:cNvPr id="9" name="角丸四角形 8">
+          <p:cNvPr id="3" name="正方形/長方形 2">
             <a:extLst>
               <a:ext uri="{FF2B5EF4-FFF2-40B4-BE49-F238E27FC236}">
-                <a16:creationId xmlns:a16="http://schemas.microsoft.com/office/drawing/2014/main" id="{8AAD9EC5-D432-D9C7-538A-24D04CF7CB5C}"/>
+                <a16:creationId xmlns:a16="http://schemas.microsoft.com/office/drawing/2014/main" id="{B0EAA9B8-8843-058D-C49B-CDD5AC7FBB07}"/>
               </a:ext>
             </a:extLst>
           </p:cNvPr>
@@ -12982,60 +12837,13 @@
         </p:nvSpPr>
         <p:spPr>
           <a:xfrm>
-            <a:off x="3200400" y="2514600"/>
-            <a:ext cx="1600200" cy="564796"/>
-          </a:xfrm>
-          <a:prstGeom prst="roundRect">
-            <a:avLst/>
-          </a:prstGeom>
-        </p:spPr>
-        <p:style>
-          <a:lnRef idx="2">
-            <a:schemeClr val="accent1">
-              <a:shade val="15000"/>
-            </a:schemeClr>
-          </a:lnRef>
-          <a:fillRef idx="1">
-            <a:schemeClr val="accent1"/>
-          </a:fillRef>
-          <a:effectRef idx="0">
-            <a:schemeClr val="accent1"/>
-          </a:effectRef>
-          <a:fontRef idx="minor">
-            <a:schemeClr val="lt1"/>
-          </a:fontRef>
-        </p:style>
-        <p:txBody>
-          <a:bodyPr rtlCol="0" anchor="ctr"/>
-          <a:lstStyle/>
-          <a:p>
-            <a:pPr algn="ctr"/>
-            <a:endParaRPr kumimoji="1" lang="en-US" altLang="ja-JP" dirty="0"/>
-          </a:p>
-        </p:txBody>
-      </p:sp>
-      <p:sp>
-        <p:nvSpPr>
-          <p:cNvPr id="11" name="正方形/長方形 10">
-            <a:extLst>
-              <a:ext uri="{FF2B5EF4-FFF2-40B4-BE49-F238E27FC236}">
-                <a16:creationId xmlns:a16="http://schemas.microsoft.com/office/drawing/2014/main" id="{1D77B438-40EA-A45A-8A95-49C3F95133DE}"/>
-              </a:ext>
-            </a:extLst>
-          </p:cNvPr>
-          <p:cNvSpPr/>
-          <p:nvPr/>
-        </p:nvSpPr>
-        <p:spPr>
-          <a:xfrm>
-            <a:off x="914400" y="2743200"/>
-            <a:ext cx="9067800" cy="1112520"/>
+            <a:off x="434340" y="2379471"/>
+            <a:ext cx="2171700" cy="1823559"/>
           </a:xfrm>
           <a:prstGeom prst="rect">
             <a:avLst/>
           </a:prstGeom>
           <a:noFill/>
-          <a:ln w="38100"/>
         </p:spPr>
         <p:style>
           <a:lnRef idx="2">
@@ -13062,411 +12870,12 @@
           </a:p>
         </p:txBody>
       </p:sp>
-      <p:grpSp>
-        <p:nvGrpSpPr>
-          <p:cNvPr id="18" name="グループ化 17">
+      <p:sp>
+        <p:nvSpPr>
+          <p:cNvPr id="4" name="角丸四角形 3">
             <a:extLst>
               <a:ext uri="{FF2B5EF4-FFF2-40B4-BE49-F238E27FC236}">
-                <a16:creationId xmlns:a16="http://schemas.microsoft.com/office/drawing/2014/main" id="{1361221D-D944-21E2-69D5-EB3A04962FDC}"/>
-              </a:ext>
-            </a:extLst>
-          </p:cNvPr>
-          <p:cNvGrpSpPr/>
-          <p:nvPr/>
-        </p:nvGrpSpPr>
-        <p:grpSpPr>
-          <a:xfrm>
-            <a:off x="9528240" y="3206040"/>
-            <a:ext cx="1172160" cy="2185200"/>
-            <a:chOff x="9528240" y="3206040"/>
-            <a:chExt cx="1172160" cy="2185200"/>
-          </a:xfrm>
-        </p:grpSpPr>
-        <mc:AlternateContent xmlns:mc="http://schemas.openxmlformats.org/markup-compatibility/2006" xmlns:p14="http://schemas.microsoft.com/office/powerpoint/2010/main">
-          <mc:Choice Requires="p14">
-            <p:contentPart p14:bwMode="auto" r:id="rId3">
-              <p14:nvContentPartPr>
-                <p14:cNvPr id="12" name="インク 11">
-                  <a:extLst>
-                    <a:ext uri="{FF2B5EF4-FFF2-40B4-BE49-F238E27FC236}">
-                      <a16:creationId xmlns:a16="http://schemas.microsoft.com/office/drawing/2014/main" id="{77D3C88B-104D-AF21-9229-E838811CBD88}"/>
-                    </a:ext>
-                  </a:extLst>
-                </p14:cNvPr>
-                <p14:cNvContentPartPr/>
-                <p14:nvPr/>
-              </p14:nvContentPartPr>
-              <p14:xfrm>
-                <a:off x="9563160" y="3453000"/>
-                <a:ext cx="1137240" cy="1938240"/>
-              </p14:xfrm>
-            </p:contentPart>
-          </mc:Choice>
-          <mc:Fallback xmlns="">
-            <p:pic>
-              <p:nvPicPr>
-                <p:cNvPr id="12" name="インク 11">
-                  <a:extLst>
-                    <a:ext uri="{FF2B5EF4-FFF2-40B4-BE49-F238E27FC236}">
-                      <a16:creationId xmlns:a16="http://schemas.microsoft.com/office/drawing/2014/main" id="{77D3C88B-104D-AF21-9229-E838811CBD88}"/>
-                    </a:ext>
-                  </a:extLst>
-                </p:cNvPr>
-                <p:cNvPicPr/>
-                <p:nvPr/>
-              </p:nvPicPr>
-              <p:blipFill>
-                <a:blip r:embed="rId4"/>
-                <a:stretch>
-                  <a:fillRect/>
-                </a:stretch>
-              </p:blipFill>
-              <p:spPr>
-                <a:xfrm>
-                  <a:off x="9557040" y="3446880"/>
-                  <a:ext cx="1149480" cy="1950480"/>
-                </a:xfrm>
-                <a:prstGeom prst="rect">
-                  <a:avLst/>
-                </a:prstGeom>
-              </p:spPr>
-            </p:pic>
-          </mc:Fallback>
-        </mc:AlternateContent>
-        <mc:AlternateContent xmlns:mc="http://schemas.openxmlformats.org/markup-compatibility/2006" xmlns:p14="http://schemas.microsoft.com/office/powerpoint/2010/main">
-          <mc:Choice Requires="p14">
-            <p:contentPart p14:bwMode="auto" r:id="rId5">
-              <p14:nvContentPartPr>
-                <p14:cNvPr id="13" name="インク 12">
-                  <a:extLst>
-                    <a:ext uri="{FF2B5EF4-FFF2-40B4-BE49-F238E27FC236}">
-                      <a16:creationId xmlns:a16="http://schemas.microsoft.com/office/drawing/2014/main" id="{C6D0F796-EFB3-E9BD-F604-085C693D54A1}"/>
-                    </a:ext>
-                  </a:extLst>
-                </p14:cNvPr>
-                <p14:cNvContentPartPr/>
-                <p14:nvPr/>
-              </p14:nvContentPartPr>
-              <p14:xfrm>
-                <a:off x="9573240" y="3515280"/>
-                <a:ext cx="114840" cy="312480"/>
-              </p14:xfrm>
-            </p:contentPart>
-          </mc:Choice>
-          <mc:Fallback xmlns="">
-            <p:pic>
-              <p:nvPicPr>
-                <p:cNvPr id="13" name="インク 12">
-                  <a:extLst>
-                    <a:ext uri="{FF2B5EF4-FFF2-40B4-BE49-F238E27FC236}">
-                      <a16:creationId xmlns:a16="http://schemas.microsoft.com/office/drawing/2014/main" id="{C6D0F796-EFB3-E9BD-F604-085C693D54A1}"/>
-                    </a:ext>
-                  </a:extLst>
-                </p:cNvPr>
-                <p:cNvPicPr/>
-                <p:nvPr/>
-              </p:nvPicPr>
-              <p:blipFill>
-                <a:blip r:embed="rId6"/>
-                <a:stretch>
-                  <a:fillRect/>
-                </a:stretch>
-              </p:blipFill>
-              <p:spPr>
-                <a:xfrm>
-                  <a:off x="9567120" y="3509160"/>
-                  <a:ext cx="127080" cy="324720"/>
-                </a:xfrm>
-                <a:prstGeom prst="rect">
-                  <a:avLst/>
-                </a:prstGeom>
-              </p:spPr>
-            </p:pic>
-          </mc:Fallback>
-        </mc:AlternateContent>
-        <mc:AlternateContent xmlns:mc="http://schemas.openxmlformats.org/markup-compatibility/2006" xmlns:p14="http://schemas.microsoft.com/office/powerpoint/2010/main">
-          <mc:Choice Requires="p14">
-            <p:contentPart p14:bwMode="auto" r:id="rId7">
-              <p14:nvContentPartPr>
-                <p14:cNvPr id="16" name="インク 15">
-                  <a:extLst>
-                    <a:ext uri="{FF2B5EF4-FFF2-40B4-BE49-F238E27FC236}">
-                      <a16:creationId xmlns:a16="http://schemas.microsoft.com/office/drawing/2014/main" id="{5C291BFF-4836-4C4A-81E5-5D3AD5DECD65}"/>
-                    </a:ext>
-                  </a:extLst>
-                </p14:cNvPr>
-                <p14:cNvContentPartPr/>
-                <p14:nvPr/>
-              </p14:nvContentPartPr>
-              <p14:xfrm>
-                <a:off x="9528240" y="3206040"/>
-                <a:ext cx="228600" cy="295560"/>
-              </p14:xfrm>
-            </p:contentPart>
-          </mc:Choice>
-          <mc:Fallback xmlns="">
-            <p:pic>
-              <p:nvPicPr>
-                <p:cNvPr id="16" name="インク 15">
-                  <a:extLst>
-                    <a:ext uri="{FF2B5EF4-FFF2-40B4-BE49-F238E27FC236}">
-                      <a16:creationId xmlns:a16="http://schemas.microsoft.com/office/drawing/2014/main" id="{5C291BFF-4836-4C4A-81E5-5D3AD5DECD65}"/>
-                    </a:ext>
-                  </a:extLst>
-                </p:cNvPr>
-                <p:cNvPicPr/>
-                <p:nvPr/>
-              </p:nvPicPr>
-              <p:blipFill>
-                <a:blip r:embed="rId8"/>
-                <a:stretch>
-                  <a:fillRect/>
-                </a:stretch>
-              </p:blipFill>
-              <p:spPr>
-                <a:xfrm>
-                  <a:off x="9522120" y="3199920"/>
-                  <a:ext cx="240840" cy="307800"/>
-                </a:xfrm>
-                <a:prstGeom prst="rect">
-                  <a:avLst/>
-                </a:prstGeom>
-              </p:spPr>
-            </p:pic>
-          </mc:Fallback>
-        </mc:AlternateContent>
-      </p:grpSp>
-      <p:sp>
-        <p:nvSpPr>
-          <p:cNvPr id="19" name="テキスト ボックス 18">
-            <a:extLst>
-              <a:ext uri="{FF2B5EF4-FFF2-40B4-BE49-F238E27FC236}">
-                <a16:creationId xmlns:a16="http://schemas.microsoft.com/office/drawing/2014/main" id="{394BF7F3-9A1E-3701-7347-F3C0792EDEFF}"/>
-              </a:ext>
-            </a:extLst>
-          </p:cNvPr>
-          <p:cNvSpPr txBox="1"/>
-          <p:nvPr/>
-        </p:nvSpPr>
-        <p:spPr>
-          <a:xfrm>
-            <a:off x="9630660" y="5453534"/>
-            <a:ext cx="1800493" cy="369332"/>
-          </a:xfrm>
-          <a:prstGeom prst="rect">
-            <a:avLst/>
-          </a:prstGeom>
-          <a:noFill/>
-        </p:spPr>
-        <p:txBody>
-          <a:bodyPr wrap="none" rtlCol="0">
-            <a:spAutoFit/>
-          </a:bodyPr>
-          <a:lstStyle/>
-          <a:p>
-            <a:r>
-              <a:rPr kumimoji="1" lang="ja-JP" altLang="en-US"/>
-              <a:t>ブレッドボード</a:t>
-            </a:r>
-            <a:endParaRPr kumimoji="1" lang="en-US" altLang="ja-JP" dirty="0"/>
-          </a:p>
-        </p:txBody>
-      </p:sp>
-      <mc:AlternateContent xmlns:mc="http://schemas.openxmlformats.org/markup-compatibility/2006" xmlns:p14="http://schemas.microsoft.com/office/powerpoint/2010/main">
-        <mc:Choice Requires="p14">
-          <p:contentPart p14:bwMode="auto" r:id="rId9">
-            <p14:nvContentPartPr>
-              <p14:cNvPr id="20" name="インク 19">
-                <a:extLst>
-                  <a:ext uri="{FF2B5EF4-FFF2-40B4-BE49-F238E27FC236}">
-                    <a16:creationId xmlns:a16="http://schemas.microsoft.com/office/drawing/2014/main" id="{158BD60B-41AD-58D3-272D-67DD80F755D2}"/>
-                  </a:ext>
-                </a:extLst>
-              </p14:cNvPr>
-              <p14:cNvContentPartPr/>
-              <p14:nvPr/>
-            </p14:nvContentPartPr>
-            <p14:xfrm>
-              <a:off x="7031280" y="3421320"/>
-              <a:ext cx="991080" cy="9360"/>
-            </p14:xfrm>
-          </p:contentPart>
-        </mc:Choice>
-        <mc:Fallback xmlns="">
-          <p:pic>
-            <p:nvPicPr>
-              <p:cNvPr id="20" name="インク 19">
-                <a:extLst>
-                  <a:ext uri="{FF2B5EF4-FFF2-40B4-BE49-F238E27FC236}">
-                    <a16:creationId xmlns:a16="http://schemas.microsoft.com/office/drawing/2014/main" id="{158BD60B-41AD-58D3-272D-67DD80F755D2}"/>
-                  </a:ext>
-                </a:extLst>
-              </p:cNvPr>
-              <p:cNvPicPr/>
-              <p:nvPr/>
-            </p:nvPicPr>
-            <p:blipFill>
-              <a:blip r:embed="rId10"/>
-              <a:stretch>
-                <a:fillRect/>
-              </a:stretch>
-            </p:blipFill>
-            <p:spPr>
-              <a:xfrm>
-                <a:off x="7025160" y="3415200"/>
-                <a:ext cx="1003320" cy="21600"/>
-              </a:xfrm>
-              <a:prstGeom prst="rect">
-                <a:avLst/>
-              </a:prstGeom>
-            </p:spPr>
-          </p:pic>
-        </mc:Fallback>
-      </mc:AlternateContent>
-      <mc:AlternateContent xmlns:mc="http://schemas.openxmlformats.org/markup-compatibility/2006" xmlns:p14="http://schemas.microsoft.com/office/powerpoint/2010/main">
-        <mc:Choice Requires="p14">
-          <p:contentPart p14:bwMode="auto" r:id="rId11">
-            <p14:nvContentPartPr>
-              <p14:cNvPr id="21" name="インク 20">
-                <a:extLst>
-                  <a:ext uri="{FF2B5EF4-FFF2-40B4-BE49-F238E27FC236}">
-                    <a16:creationId xmlns:a16="http://schemas.microsoft.com/office/drawing/2014/main" id="{A0C06BC4-3414-49F6-6D76-3C979304D2B1}"/>
-                  </a:ext>
-                </a:extLst>
-              </p14:cNvPr>
-              <p14:cNvContentPartPr/>
-              <p14:nvPr/>
-            </p14:nvContentPartPr>
-            <p14:xfrm>
-              <a:off x="5052360" y="3437520"/>
-              <a:ext cx="754200" cy="16560"/>
-            </p14:xfrm>
-          </p:contentPart>
-        </mc:Choice>
-        <mc:Fallback xmlns="">
-          <p:pic>
-            <p:nvPicPr>
-              <p:cNvPr id="21" name="インク 20">
-                <a:extLst>
-                  <a:ext uri="{FF2B5EF4-FFF2-40B4-BE49-F238E27FC236}">
-                    <a16:creationId xmlns:a16="http://schemas.microsoft.com/office/drawing/2014/main" id="{A0C06BC4-3414-49F6-6D76-3C979304D2B1}"/>
-                  </a:ext>
-                </a:extLst>
-              </p:cNvPr>
-              <p:cNvPicPr/>
-              <p:nvPr/>
-            </p:nvPicPr>
-            <p:blipFill>
-              <a:blip r:embed="rId12"/>
-              <a:stretch>
-                <a:fillRect/>
-              </a:stretch>
-            </p:blipFill>
-            <p:spPr>
-              <a:xfrm>
-                <a:off x="5046240" y="3431400"/>
-                <a:ext cx="766440" cy="28800"/>
-              </a:xfrm>
-              <a:prstGeom prst="rect">
-                <a:avLst/>
-              </a:prstGeom>
-            </p:spPr>
-          </p:pic>
-        </mc:Fallback>
-      </mc:AlternateContent>
-      <mc:AlternateContent xmlns:mc="http://schemas.openxmlformats.org/markup-compatibility/2006" xmlns:p14="http://schemas.microsoft.com/office/powerpoint/2010/main">
-        <mc:Choice Requires="p14">
-          <p:contentPart p14:bwMode="auto" r:id="rId13">
-            <p14:nvContentPartPr>
-              <p14:cNvPr id="24" name="インク 23">
-                <a:extLst>
-                  <a:ext uri="{FF2B5EF4-FFF2-40B4-BE49-F238E27FC236}">
-                    <a16:creationId xmlns:a16="http://schemas.microsoft.com/office/drawing/2014/main" id="{49B8058B-CB1C-6858-706D-F5291EBA81B7}"/>
-                  </a:ext>
-                </a:extLst>
-              </p14:cNvPr>
-              <p14:cNvContentPartPr/>
-              <p14:nvPr/>
-            </p14:nvContentPartPr>
-            <p14:xfrm>
-              <a:off x="2621280" y="3623280"/>
-              <a:ext cx="3195360" cy="171360"/>
-            </p14:xfrm>
-          </p:contentPart>
-        </mc:Choice>
-        <mc:Fallback xmlns="">
-          <p:pic>
-            <p:nvPicPr>
-              <p:cNvPr id="24" name="インク 23">
-                <a:extLst>
-                  <a:ext uri="{FF2B5EF4-FFF2-40B4-BE49-F238E27FC236}">
-                    <a16:creationId xmlns:a16="http://schemas.microsoft.com/office/drawing/2014/main" id="{49B8058B-CB1C-6858-706D-F5291EBA81B7}"/>
-                  </a:ext>
-                </a:extLst>
-              </p:cNvPr>
-              <p:cNvPicPr/>
-              <p:nvPr/>
-            </p:nvPicPr>
-            <p:blipFill>
-              <a:blip r:embed="rId14"/>
-              <a:stretch>
-                <a:fillRect/>
-              </a:stretch>
-            </p:blipFill>
-            <p:spPr>
-              <a:xfrm>
-                <a:off x="2615160" y="3617160"/>
-                <a:ext cx="3207600" cy="183600"/>
-              </a:xfrm>
-              <a:prstGeom prst="rect">
-                <a:avLst/>
-              </a:prstGeom>
-            </p:spPr>
-          </p:pic>
-        </mc:Fallback>
-      </mc:AlternateContent>
-      <p:sp>
-        <p:nvSpPr>
-          <p:cNvPr id="25" name="テキスト ボックス 24">
-            <a:extLst>
-              <a:ext uri="{FF2B5EF4-FFF2-40B4-BE49-F238E27FC236}">
-                <a16:creationId xmlns:a16="http://schemas.microsoft.com/office/drawing/2014/main" id="{2CD6973B-6288-6013-59C8-E7E6694CC7E8}"/>
-              </a:ext>
-            </a:extLst>
-          </p:cNvPr>
-          <p:cNvSpPr txBox="1"/>
-          <p:nvPr/>
-        </p:nvSpPr>
-        <p:spPr>
-          <a:xfrm>
-            <a:off x="4015770" y="2010140"/>
-            <a:ext cx="1569660" cy="369332"/>
-          </a:xfrm>
-          <a:prstGeom prst="rect">
-            <a:avLst/>
-          </a:prstGeom>
-          <a:noFill/>
-        </p:spPr>
-        <p:txBody>
-          <a:bodyPr wrap="none" rtlCol="0">
-            <a:spAutoFit/>
-          </a:bodyPr>
-          <a:lstStyle/>
-          <a:p>
-            <a:r>
-              <a:rPr lang="ja-JP" altLang="en-US"/>
-              <a:t>スライド操作</a:t>
-            </a:r>
-            <a:endParaRPr kumimoji="1" lang="en-US" altLang="ja-JP" dirty="0"/>
-          </a:p>
-        </p:txBody>
-      </p:sp>
-      <p:sp>
-        <p:nvSpPr>
-          <p:cNvPr id="26" name="正方形/長方形 25">
-            <a:extLst>
-              <a:ext uri="{FF2B5EF4-FFF2-40B4-BE49-F238E27FC236}">
-                <a16:creationId xmlns:a16="http://schemas.microsoft.com/office/drawing/2014/main" id="{1BE692DD-CA3B-0528-FFBA-7F2710E6908F}"/>
+                <a16:creationId xmlns:a16="http://schemas.microsoft.com/office/drawing/2014/main" id="{ADE86D94-D20D-5450-C175-9D7D03C17052}"/>
               </a:ext>
             </a:extLst>
           </p:cNvPr>
@@ -13475,12 +12884,26 @@
         </p:nvSpPr>
         <p:spPr>
           <a:xfrm>
-            <a:off x="3429000" y="2218706"/>
-            <a:ext cx="91440" cy="291100"/>
+            <a:off x="2815590" y="2499628"/>
+            <a:ext cx="2026920" cy="731520"/>
           </a:xfrm>
-          <a:prstGeom prst="rect">
+          <a:prstGeom prst="roundRect">
             <a:avLst/>
           </a:prstGeom>
+          <a:solidFill>
+            <a:schemeClr val="accent6">
+              <a:lumMod val="60000"/>
+              <a:lumOff val="40000"/>
+            </a:schemeClr>
+          </a:solidFill>
+          <a:ln>
+            <a:solidFill>
+              <a:schemeClr val="accent6">
+                <a:lumMod val="60000"/>
+                <a:lumOff val="40000"/>
+              </a:schemeClr>
+            </a:solidFill>
+          </a:ln>
         </p:spPr>
         <p:style>
           <a:lnRef idx="2">
@@ -13503,7 +12926,232 @@
           <a:lstStyle/>
           <a:p>
             <a:pPr algn="ctr"/>
-            <a:endParaRPr kumimoji="1" lang="ja-JP" altLang="en-US"/>
+            <a:r>
+              <a:rPr lang="ja-JP" altLang="en-US"/>
+              <a:t>可変抵抗器</a:t>
+            </a:r>
+            <a:endParaRPr kumimoji="1" lang="en-US" altLang="ja-JP" dirty="0"/>
+          </a:p>
+        </p:txBody>
+      </p:sp>
+      <p:grpSp>
+        <p:nvGrpSpPr>
+          <p:cNvPr id="10" name="グループ化 9">
+            <a:extLst>
+              <a:ext uri="{FF2B5EF4-FFF2-40B4-BE49-F238E27FC236}">
+                <a16:creationId xmlns:a16="http://schemas.microsoft.com/office/drawing/2014/main" id="{9D866AA4-A92F-37B0-4D91-A5DBDA498FDB}"/>
+              </a:ext>
+            </a:extLst>
+          </p:cNvPr>
+          <p:cNvGrpSpPr/>
+          <p:nvPr/>
+        </p:nvGrpSpPr>
+        <p:grpSpPr>
+          <a:xfrm>
+            <a:off x="5785105" y="2771119"/>
+            <a:ext cx="686180" cy="832696"/>
+            <a:chOff x="7227613" y="1491365"/>
+            <a:chExt cx="589611" cy="949552"/>
+          </a:xfrm>
+        </p:grpSpPr>
+        <p:sp>
+          <p:nvSpPr>
+            <p:cNvPr id="14" name="正方形/長方形 13">
+              <a:extLst>
+                <a:ext uri="{FF2B5EF4-FFF2-40B4-BE49-F238E27FC236}">
+                  <a16:creationId xmlns:a16="http://schemas.microsoft.com/office/drawing/2014/main" id="{320FEEFC-8998-2B69-1C04-32B4CEBDB140}"/>
+                </a:ext>
+              </a:extLst>
+            </p:cNvPr>
+            <p:cNvSpPr/>
+            <p:nvPr/>
+          </p:nvSpPr>
+          <p:spPr>
+            <a:xfrm>
+              <a:off x="7227613" y="1685365"/>
+              <a:ext cx="589611" cy="755552"/>
+            </a:xfrm>
+            <a:prstGeom prst="rect">
+              <a:avLst/>
+            </a:prstGeom>
+            <a:noFill/>
+            <a:ln w="25400"/>
+          </p:spPr>
+          <p:style>
+            <a:lnRef idx="2">
+              <a:schemeClr val="accent1">
+                <a:shade val="15000"/>
+              </a:schemeClr>
+            </a:lnRef>
+            <a:fillRef idx="1">
+              <a:schemeClr val="accent1"/>
+            </a:fillRef>
+            <a:effectRef idx="0">
+              <a:schemeClr val="accent1"/>
+            </a:effectRef>
+            <a:fontRef idx="minor">
+              <a:schemeClr val="lt1"/>
+            </a:fontRef>
+          </p:style>
+          <p:txBody>
+            <a:bodyPr rtlCol="0" anchor="ctr"/>
+            <a:lstStyle/>
+            <a:p>
+              <a:pPr algn="ctr"/>
+              <a:endParaRPr kumimoji="1" lang="ja-JP" altLang="en-US">
+                <a:noFill/>
+              </a:endParaRPr>
+            </a:p>
+          </p:txBody>
+        </p:sp>
+        <p:sp>
+          <p:nvSpPr>
+            <p:cNvPr id="15" name="正方形/長方形 14">
+              <a:extLst>
+                <a:ext uri="{FF2B5EF4-FFF2-40B4-BE49-F238E27FC236}">
+                  <a16:creationId xmlns:a16="http://schemas.microsoft.com/office/drawing/2014/main" id="{B469B99A-C1C0-9C82-23B8-C6DC686C6321}"/>
+                </a:ext>
+              </a:extLst>
+            </p:cNvPr>
+            <p:cNvSpPr/>
+            <p:nvPr/>
+          </p:nvSpPr>
+          <p:spPr>
+            <a:xfrm>
+              <a:off x="7371026" y="1491365"/>
+              <a:ext cx="302783" cy="387999"/>
+            </a:xfrm>
+            <a:prstGeom prst="rect">
+              <a:avLst/>
+            </a:prstGeom>
+            <a:noFill/>
+            <a:ln w="25400"/>
+          </p:spPr>
+          <p:style>
+            <a:lnRef idx="2">
+              <a:schemeClr val="accent1">
+                <a:shade val="15000"/>
+              </a:schemeClr>
+            </a:lnRef>
+            <a:fillRef idx="1">
+              <a:schemeClr val="accent1"/>
+            </a:fillRef>
+            <a:effectRef idx="0">
+              <a:schemeClr val="accent1"/>
+            </a:effectRef>
+            <a:fontRef idx="minor">
+              <a:schemeClr val="lt1"/>
+            </a:fontRef>
+          </p:style>
+          <p:txBody>
+            <a:bodyPr rtlCol="0" anchor="ctr"/>
+            <a:lstStyle/>
+            <a:p>
+              <a:pPr algn="ctr"/>
+              <a:endParaRPr kumimoji="1" lang="ja-JP" altLang="en-US">
+                <a:noFill/>
+              </a:endParaRPr>
+            </a:p>
+          </p:txBody>
+        </p:sp>
+      </p:grpSp>
+      <p:sp>
+        <p:nvSpPr>
+          <p:cNvPr id="17" name="正方形/長方形 16">
+            <a:extLst>
+              <a:ext uri="{FF2B5EF4-FFF2-40B4-BE49-F238E27FC236}">
+                <a16:creationId xmlns:a16="http://schemas.microsoft.com/office/drawing/2014/main" id="{70E5D7D8-5F90-B234-577F-BDE68DDC351B}"/>
+              </a:ext>
+            </a:extLst>
+          </p:cNvPr>
+          <p:cNvSpPr/>
+          <p:nvPr/>
+        </p:nvSpPr>
+        <p:spPr>
+          <a:xfrm>
+            <a:off x="2862983" y="2054502"/>
+            <a:ext cx="285981" cy="809421"/>
+          </a:xfrm>
+          <a:prstGeom prst="rect">
+            <a:avLst/>
+          </a:prstGeom>
+          <a:noFill/>
+          <a:ln w="25400"/>
+        </p:spPr>
+        <p:style>
+          <a:lnRef idx="2">
+            <a:schemeClr val="accent1">
+              <a:shade val="15000"/>
+            </a:schemeClr>
+          </a:lnRef>
+          <a:fillRef idx="1">
+            <a:schemeClr val="accent1"/>
+          </a:fillRef>
+          <a:effectRef idx="0">
+            <a:schemeClr val="accent1"/>
+          </a:effectRef>
+          <a:fontRef idx="minor">
+            <a:schemeClr val="lt1"/>
+          </a:fontRef>
+        </p:style>
+        <p:txBody>
+          <a:bodyPr rtlCol="0" anchor="ctr"/>
+          <a:lstStyle/>
+          <a:p>
+            <a:pPr algn="ctr"/>
+            <a:endParaRPr kumimoji="1" lang="ja-JP" altLang="en-US">
+              <a:noFill/>
+            </a:endParaRPr>
+          </a:p>
+        </p:txBody>
+      </p:sp>
+      <p:sp>
+        <p:nvSpPr>
+          <p:cNvPr id="22" name="正方形/長方形 21">
+            <a:extLst>
+              <a:ext uri="{FF2B5EF4-FFF2-40B4-BE49-F238E27FC236}">
+                <a16:creationId xmlns:a16="http://schemas.microsoft.com/office/drawing/2014/main" id="{7FEC0A44-B85C-B331-EE32-AE2D5C2EC399}"/>
+              </a:ext>
+            </a:extLst>
+          </p:cNvPr>
+          <p:cNvSpPr/>
+          <p:nvPr/>
+        </p:nvSpPr>
+        <p:spPr>
+          <a:xfrm>
+            <a:off x="2872740" y="2977343"/>
+            <a:ext cx="285981" cy="809421"/>
+          </a:xfrm>
+          <a:prstGeom prst="rect">
+            <a:avLst/>
+          </a:prstGeom>
+          <a:noFill/>
+          <a:ln w="25400"/>
+        </p:spPr>
+        <p:style>
+          <a:lnRef idx="2">
+            <a:schemeClr val="accent1">
+              <a:shade val="15000"/>
+            </a:schemeClr>
+          </a:lnRef>
+          <a:fillRef idx="1">
+            <a:schemeClr val="accent1"/>
+          </a:fillRef>
+          <a:effectRef idx="0">
+            <a:schemeClr val="accent1"/>
+          </a:effectRef>
+          <a:fontRef idx="minor">
+            <a:schemeClr val="lt1"/>
+          </a:fontRef>
+        </p:style>
+        <p:txBody>
+          <a:bodyPr rtlCol="0" anchor="ctr"/>
+          <a:lstStyle/>
+          <a:p>
+            <a:pPr algn="ctr"/>
+            <a:endParaRPr kumimoji="1" lang="ja-JP" altLang="en-US">
+              <a:noFill/>
+            </a:endParaRPr>
           </a:p>
         </p:txBody>
       </p:sp>
@@ -13598,7 +13246,7 @@
         </p:nvSpPr>
         <p:spPr>
           <a:xfrm>
-            <a:off x="7227613" y="1685365"/>
+            <a:off x="7413880" y="847165"/>
             <a:ext cx="589611" cy="755552"/>
           </a:xfrm>
           <a:prstGeom prst="rect">
@@ -13648,7 +13296,7 @@
         </p:nvSpPr>
         <p:spPr>
           <a:xfrm>
-            <a:off x="7371026" y="1491365"/>
+            <a:off x="7557293" y="653165"/>
             <a:ext cx="302783" cy="387999"/>
           </a:xfrm>
           <a:prstGeom prst="rect">
@@ -21007,7 +20655,7 @@
         </p:blipFill>
         <p:spPr>
           <a:xfrm>
-            <a:off x="196200" y="495843"/>
+            <a:off x="273501" y="749033"/>
             <a:ext cx="8214777" cy="5073833"/>
           </a:xfrm>
           <a:prstGeom prst="rect">
